--- a/marketing/LogicClass-Demo.pptx
+++ b/marketing/LogicClass-Demo.pptx
@@ -10806,7 +10806,7 @@
                 <a:ea typeface="Calibri" pitchFamily="34" charset="-122"/>
                 <a:cs typeface="Calibri" pitchFamily="34" charset="-120"/>
               </a:rPr>
-              <a:t>Cash, GCash or bank transfer, with a purpose and a reference number, and a receipt number the client cannot invent</a:t>
+              <a:t>Type the number on the ID card and the student's name, class and balance appear. Nothing sends until the ID names somebody</a:t>
             </a:r>
             <a:endParaRPr lang="en-US" sz="1000" dirty="0"/>
           </a:p>
@@ -18580,7 +18580,7 @@
                 <a:ea typeface="Calibri" pitchFamily="34" charset="-122"/>
                 <a:cs typeface="Calibri" pitchFamily="34" charset="-120"/>
               </a:rPr>
-              <a:t>Every create, edit and delete lands in the audit trail with who did it and when, automatically - not because a screen remembered to log it.</a:t>
+              <a:t>Every create, edit and delete lands in the audit trail with who did it and when, automatically. A decision on a request is signed with the account that made it, so an approval cannot be attributed to somebody else.</a:t>
             </a:r>
             <a:endParaRPr lang="en-US" sz="1100" dirty="0"/>
           </a:p>
@@ -23719,7 +23719,7 @@
                 <a:ea typeface="Calibri" pitchFamily="34" charset="-122"/>
                 <a:cs typeface="Calibri" pitchFamily="34" charset="-120"/>
               </a:rPr>
-              <a:t>One inbox for every request filed in the school - approve or reject with a reason</a:t>
+              <a:t>One inbox for every request in the school. Every decision records who made it, when, and what they were deciding</a:t>
             </a:r>
             <a:endParaRPr lang="en-US" sz="1000" dirty="0"/>
           </a:p>
@@ -26350,7 +26350,7 @@
                 <a:ea typeface="Calibri" pitchFamily="34" charset="-122"/>
                 <a:cs typeface="Calibri" pitchFamily="34" charset="-120"/>
               </a:rPr>
-              <a:t>Decide the requests that reach a division head.</a:t>
+              <a:t>Decide the requests that reach a division head - and the decision is signed with their account.</a:t>
             </a:r>
             <a:endParaRPr lang="en-US" sz="1100" dirty="0"/>
           </a:p>
@@ -30501,7 +30501,7 @@
                 <a:ea typeface="Calibri" pitchFamily="34" charset="-122"/>
                 <a:cs typeface="Calibri" pitchFamily="34" charset="-120"/>
               </a:rPr>
-              <a:t>Cash, GCash or bank transfer, with a sequential receipt number</a:t>
+              <a:t>Cash, GCash or bank transfer, with a sequential receipt number and the balance in front of you</a:t>
             </a:r>
             <a:endParaRPr lang="en-US" sz="1000" dirty="0"/>
           </a:p>

--- a/marketing/LogicClass-Demo.pptx
+++ b/marketing/LogicClass-Demo.pptx
@@ -20957,7 +20957,7 @@
                 <a:ea typeface="Calibri" pitchFamily="34" charset="-122"/>
                 <a:cs typeface="Calibri" pitchFamily="34" charset="-120"/>
               </a:rPr>
-              <a:t>13th month</a:t>
+              <a:t>Server-computed</a:t>
             </a:r>
             <a:endParaRPr lang="en-US" sz="1400" dirty="0"/>
           </a:p>
@@ -20999,7 +20999,7 @@
                 <a:ea typeface="Calibri" pitchFamily="34" charset="-122"/>
                 <a:cs typeface="Calibri" pitchFamily="34" charset="-120"/>
               </a:rPr>
-              <a:t>A twelfth of what was actually earned across the year, computed from the runs rather than from a headline salary.</a:t>
+              <a:t>The rates, the tables, the scans and the approved leave are all read server-side. No figure on a payslip comes from the device that pressed Issue.</a:t>
             </a:r>
             <a:endParaRPr lang="en-US" sz="1100" dirty="0"/>
           </a:p>
@@ -21163,7 +21163,7 @@
                 <a:ea typeface="Calibri" pitchFamily="34" charset="-122"/>
                 <a:cs typeface="Calibri" pitchFamily="34" charset="-120"/>
               </a:rPr>
-              <a:t>A5, two to a sheet, with the basis of every line on it - so an employee can check their own pay without asking anybody.</a:t>
+              <a:t>A5, two to a sheet, your logo behind it, and the basis of every line on it - so an employee can check their own pay without asking anybody.</a:t>
             </a:r>
             <a:endParaRPr lang="en-US" sz="1100" dirty="0"/>
           </a:p>

--- a/marketing/LogicClass-Demo.pptx
+++ b/marketing/LogicClass-Demo.pptx
@@ -891,7 +891,7 @@
           <a:p>
             <a:r>
               <a:rPr lang="en-US" dirty="0"/>
-              <a:t>Grades arrive by hand or from a spreadsheet, and the class record shows the arithmetic. The rescaling point is the one teachers react to: every other system they have used counts a missing exam as a zero.</a:t>
+              <a:t>Open the class record in the demo and type a mark - the grade moves as you save. Two things teachers react to: a missing exam is not a zero, and a corrected mark replaces rather than doubling. Every other system they have used gets one of those wrong.</a:t>
             </a:r>
             <a:endParaRPr lang="en-US" dirty="0"/>
           </a:p>
@@ -8231,7 +8231,7 @@
                 <a:ea typeface="Calibri" pitchFamily="34" charset="-122"/>
                 <a:cs typeface="Calibri" pitchFamily="34" charset="-120"/>
               </a:rPr>
-              <a:t>The weights are the school's</a:t>
+              <a:t>The class record</a:t>
             </a:r>
             <a:endParaRPr lang="en-US" sz="1400" dirty="0"/>
           </a:p>
@@ -8273,7 +8273,7 @@
                 <a:ea typeface="Calibri" pitchFamily="34" charset="-122"/>
                 <a:cs typeface="Calibri" pitchFamily="34" charset="-120"/>
               </a:rPr>
-              <a:t>Seeded with the DepEd Order 8 s.2015 groupings as a starting point, then edited and confirmed by a named person at the school.</a:t>
+              <a:t>One piece of work is a column, the class is the rows. Type the marks down it once and every grade recomputes - no dialog per child, and a corrected mark replaces the wrong one rather than adding to it.</a:t>
             </a:r>
             <a:endParaRPr lang="en-US" sz="1100" dirty="0"/>
           </a:p>
@@ -8395,7 +8395,7 @@
                 <a:ea typeface="Calibri" pitchFamily="34" charset="-122"/>
                 <a:cs typeface="Calibri" pitchFamily="34" charset="-120"/>
               </a:rPr>
-              <a:t>A missing component is not a zero</a:t>
+              <a:t>The percentages are yours</a:t>
             </a:r>
             <a:endParaRPr lang="en-US" sz="1400" dirty="0"/>
           </a:p>
@@ -8437,7 +8437,7 @@
                 <a:ea typeface="Calibri" pitchFamily="34" charset="-122"/>
                 <a:cs typeface="Calibri" pitchFamily="34" charset="-120"/>
               </a:rPr>
-              <a:t>In week two of a quarter no exam has been given. The grade is rescaled out of the weight that exists and names what is still missing, rather than capping every child at 80.</a:t>
+              <a:t>Seeded with the DepEd Order 8 s.2015 groupings and confirmed by a named person at the school - and a subject teacher can set their own split for their class, as long as it adds up to a hundred.</a:t>
             </a:r>
             <a:endParaRPr lang="en-US" sz="1100" dirty="0"/>
           </a:p>
@@ -8559,7 +8559,7 @@
                 <a:ea typeface="Calibri" pitchFamily="34" charset="-122"/>
                 <a:cs typeface="Calibri" pitchFamily="34" charset="-120"/>
               </a:rPr>
-              <a:t>The report card</a:t>
+              <a:t>A missing component is not a zero</a:t>
             </a:r>
             <a:endParaRPr lang="en-US" sz="1400" dirty="0"/>
           </a:p>
@@ -8601,7 +8601,7 @@
                 <a:ea typeface="Calibri" pitchFamily="34" charset="-122"/>
                 <a:cs typeface="Calibri" pitchFamily="34" charset="-120"/>
               </a:rPr>
-              <a:t>Form 138 on the school's own letterhead: every subject, every quarter, the final grade, the descriptor and the remarks.</a:t>
+              <a:t>In week two of a quarter no exam has been given. The grade is rescaled out of the weight that exists and names what is still missing, rather than capping every child at 80.</a:t>
             </a:r>
             <a:endParaRPr lang="en-US" sz="1100" dirty="0"/>
           </a:p>
@@ -8723,7 +8723,7 @@
                 <a:ea typeface="Calibri" pitchFamily="34" charset="-122"/>
                 <a:cs typeface="Calibri" pitchFamily="34" charset="-120"/>
               </a:rPr>
-              <a:t>Nothing prints unconfirmed</a:t>
+              <a:t>The report card shows its work</a:t>
             </a:r>
             <a:endParaRPr lang="en-US" sz="1400" dirty="0"/>
           </a:p>
@@ -8765,7 +8765,7 @@
                 <a:ea typeface="Calibri" pitchFamily="34" charset="-122"/>
                 <a:cs typeface="Calibri" pitchFamily="34" charset="-120"/>
               </a:rPr>
-              <a:t>Until somebody at the school has checked the weights against the order current for them, the report card refuses to print - and editing them revokes the confirmation.</a:t>
+              <a:t>Form 138 on the school's own letterhead, and a second page giving every component - raw over possible, the percentage, the weight, what it contributed - for the quarter being read.</a:t>
             </a:r>
             <a:endParaRPr lang="en-US" sz="1100" dirty="0"/>
           </a:p>

--- a/marketing/LogicClass-Demo.pptx
+++ b/marketing/LogicClass-Demo.pptx
@@ -13081,7 +13081,7 @@
                 <a:ea typeface="Calibri" pitchFamily="34" charset="-122"/>
                 <a:cs typeface="Calibri" pitchFamily="34" charset="-120"/>
               </a:rPr>
-              <a:t>Open Scan Attendance, point at the code, and the record is written. Scan again later and it is a time-out, not a duplicate.</a:t>
+              <a:t>Open Scan Attendance, point at the code, and the record is written. Scan again later and it is a time-out - but a second tap in the queue, seconds after the first, is not: the person is already in, and the scanner says so.</a:t>
             </a:r>
             <a:endParaRPr lang="en-US" sz="1100" dirty="0"/>
           </a:p>
@@ -26370,7 +26370,7 @@
                 <a:ea typeface="Calibri" pitchFamily="34" charset="-122"/>
                 <a:cs typeface="Calibri" pitchFamily="34" charset="-120"/>
               </a:rPr>
-              <a:t>Build the week block by block: subject, section, teacher, room, day, start and end.</a:t>
+              <a:t>Build the week block by block: subject, section, teacher, room, day, start and end - and, for a school that runs semesters, which one.</a:t>
             </a:r>
             <a:endParaRPr lang="en-US" sz="1350" dirty="0"/>
           </a:p>
@@ -26384,12 +26384,12 @@
         </p:nvSpPr>
         <p:spPr>
           <a:xfrm>
-            <a:off x="640080" y="2148840"/>
-            <a:ext cx="5349240" cy="2103120"/>
+            <a:off x="640080" y="1965960"/>
+            <a:ext cx="3496056" cy="2148840"/>
           </a:xfrm>
           <a:prstGeom prst="roundRect">
             <a:avLst>
-              <a:gd name="adj" fmla="val 4348"/>
+              <a:gd name="adj" fmla="val 4255"/>
             </a:avLst>
           </a:prstGeom>
           <a:solidFill>
@@ -26418,7 +26418,7 @@
         </p:nvSpPr>
         <p:spPr>
           <a:xfrm>
-            <a:off x="877824" y="2368296"/>
+            <a:off x="877824" y="2185416"/>
             <a:ext cx="475488" cy="475488"/>
           </a:xfrm>
           <a:prstGeom prst="ellipse">
@@ -26451,7 +26451,7 @@
         </p:blipFill>
         <p:spPr>
           <a:xfrm>
-            <a:off x="992124" y="2482596"/>
+            <a:off x="992124" y="2299716"/>
             <a:ext cx="228600" cy="228600"/>
           </a:xfrm>
           <a:prstGeom prst="rect">
@@ -26467,8 +26467,8 @@
         </p:nvSpPr>
         <p:spPr>
           <a:xfrm>
-            <a:off x="877824" y="2935224"/>
-            <a:ext cx="4873752" cy="274320"/>
+            <a:off x="877824" y="2752344"/>
+            <a:ext cx="3020568" cy="274320"/>
           </a:xfrm>
           <a:prstGeom prst="rect">
             <a:avLst/>
@@ -26506,8 +26506,8 @@
         </p:nvSpPr>
         <p:spPr>
           <a:xfrm>
-            <a:off x="877824" y="3218688"/>
-            <a:ext cx="4873752" cy="822960"/>
+            <a:off x="877824" y="3035808"/>
+            <a:ext cx="3020568" cy="868680"/>
           </a:xfrm>
           <a:prstGeom prst="rect">
             <a:avLst/>
@@ -26548,12 +26548,12 @@
         </p:nvSpPr>
         <p:spPr>
           <a:xfrm>
-            <a:off x="6199632" y="2148840"/>
-            <a:ext cx="5349240" cy="2103120"/>
+            <a:off x="4346448" y="1965960"/>
+            <a:ext cx="3496056" cy="2148840"/>
           </a:xfrm>
           <a:prstGeom prst="roundRect">
             <a:avLst>
-              <a:gd name="adj" fmla="val 4348"/>
+              <a:gd name="adj" fmla="val 4255"/>
             </a:avLst>
           </a:prstGeom>
           <a:solidFill>
@@ -26582,7 +26582,7 @@
         </p:nvSpPr>
         <p:spPr>
           <a:xfrm>
-            <a:off x="6437376" y="2368296"/>
+            <a:off x="4584192" y="2185416"/>
             <a:ext cx="475488" cy="475488"/>
           </a:xfrm>
           <a:prstGeom prst="ellipse">
@@ -26615,7 +26615,7 @@
         </p:blipFill>
         <p:spPr>
           <a:xfrm>
-            <a:off x="6551676" y="2482596"/>
+            <a:off x="4698492" y="2299716"/>
             <a:ext cx="228600" cy="228600"/>
           </a:xfrm>
           <a:prstGeom prst="rect">
@@ -26631,8 +26631,8 @@
         </p:nvSpPr>
         <p:spPr>
           <a:xfrm>
-            <a:off x="6437376" y="2935224"/>
-            <a:ext cx="4873752" cy="274320"/>
+            <a:off x="4584192" y="2752344"/>
+            <a:ext cx="3020568" cy="274320"/>
           </a:xfrm>
           <a:prstGeom prst="rect">
             <a:avLst/>
@@ -26656,7 +26656,7 @@
                 <a:ea typeface="Calibri" pitchFamily="34" charset="-122"/>
                 <a:cs typeface="Calibri" pitchFamily="34" charset="-120"/>
               </a:rPr>
-              <a:t>Times the way people type them</a:t>
+              <a:t>Two semesters, one year</a:t>
             </a:r>
             <a:endParaRPr lang="en-US" sz="1400" dirty="0"/>
           </a:p>
@@ -26670,8 +26670,8 @@
         </p:nvSpPr>
         <p:spPr>
           <a:xfrm>
-            <a:off x="6437376" y="3218688"/>
-            <a:ext cx="4873752" cy="822960"/>
+            <a:off x="4584192" y="3035808"/>
+            <a:ext cx="3020568" cy="868680"/>
           </a:xfrm>
           <a:prstGeom prst="rect">
             <a:avLst/>
@@ -26698,7 +26698,7 @@
                 <a:ea typeface="Calibri" pitchFamily="34" charset="-122"/>
                 <a:cs typeface="Calibri" pitchFamily="34" charset="-120"/>
               </a:rPr>
-              <a:t>7:30 AM, 7:30am, 07:30, 0730 - all understood. Nobody should have to learn a time format to build a timetable.</a:t>
+              <a:t>Senior High and college change timetable halfway through. The second semester reuses the same room, lecturer and slot - not a clash, because the two are never in the same week.</a:t>
             </a:r>
             <a:endParaRPr lang="en-US" sz="1100" dirty="0"/>
           </a:p>
@@ -26712,12 +26712,12 @@
         </p:nvSpPr>
         <p:spPr>
           <a:xfrm>
-            <a:off x="640080" y="4480560"/>
-            <a:ext cx="5349240" cy="2103120"/>
+            <a:off x="8052816" y="1965960"/>
+            <a:ext cx="3496056" cy="2148840"/>
           </a:xfrm>
           <a:prstGeom prst="roundRect">
             <a:avLst>
-              <a:gd name="adj" fmla="val 4348"/>
+              <a:gd name="adj" fmla="val 4255"/>
             </a:avLst>
           </a:prstGeom>
           <a:solidFill>
@@ -26746,7 +26746,7 @@
         </p:nvSpPr>
         <p:spPr>
           <a:xfrm>
-            <a:off x="877824" y="4700016"/>
+            <a:off x="8290560" y="2185416"/>
             <a:ext cx="475488" cy="475488"/>
           </a:xfrm>
           <a:prstGeom prst="ellipse">
@@ -26779,7 +26779,7 @@
         </p:blipFill>
         <p:spPr>
           <a:xfrm>
-            <a:off x="992124" y="4814316"/>
+            <a:off x="8404860" y="2299716"/>
             <a:ext cx="228600" cy="228600"/>
           </a:xfrm>
           <a:prstGeom prst="rect">
@@ -26795,8 +26795,8 @@
         </p:nvSpPr>
         <p:spPr>
           <a:xfrm>
-            <a:off x="877824" y="5266944"/>
-            <a:ext cx="4873752" cy="274320"/>
+            <a:off x="8290560" y="2752344"/>
+            <a:ext cx="3020568" cy="274320"/>
           </a:xfrm>
           <a:prstGeom prst="rect">
             <a:avLst/>
@@ -26820,7 +26820,7 @@
                 <a:ea typeface="Calibri" pitchFamily="34" charset="-122"/>
                 <a:cs typeface="Calibri" pitchFamily="34" charset="-120"/>
               </a:rPr>
-              <a:t>Printed as a grid</a:t>
+              <a:t>One term at a time</a:t>
             </a:r>
             <a:endParaRPr lang="en-US" sz="1400" dirty="0"/>
           </a:p>
@@ -26834,8 +26834,8 @@
         </p:nvSpPr>
         <p:spPr>
           <a:xfrm>
-            <a:off x="877824" y="5550408"/>
-            <a:ext cx="4873752" cy="822960"/>
+            <a:off x="8290560" y="3035808"/>
+            <a:ext cx="3020568" cy="868680"/>
           </a:xfrm>
           <a:prstGeom prst="rect">
             <a:avLst/>
@@ -26862,7 +26862,7 @@
                 <a:ea typeface="Calibri" pitchFamily="34" charset="-122"/>
                 <a:cs typeface="Calibri" pitchFamily="34" charset="-120"/>
               </a:rPr>
-              <a:t>The week as a wall chart, with the section or the teacher dropped from the cells when it is the same all the way down.</a:t>
+              <a:t>Pick the term and read that week; classes that run all year show in every term, because that is where they actually are. A school with one timetable is never asked the question.</a:t>
             </a:r>
             <a:endParaRPr lang="en-US" sz="1100" dirty="0"/>
           </a:p>
@@ -26876,12 +26876,12 @@
         </p:nvSpPr>
         <p:spPr>
           <a:xfrm>
-            <a:off x="6199632" y="4480560"/>
-            <a:ext cx="5349240" cy="2103120"/>
+            <a:off x="640080" y="4343400"/>
+            <a:ext cx="3496056" cy="2148840"/>
           </a:xfrm>
           <a:prstGeom prst="roundRect">
             <a:avLst>
-              <a:gd name="adj" fmla="val 4348"/>
+              <a:gd name="adj" fmla="val 4255"/>
             </a:avLst>
           </a:prstGeom>
           <a:solidFill>
@@ -26910,7 +26910,7 @@
         </p:nvSpPr>
         <p:spPr>
           <a:xfrm>
-            <a:off x="6437376" y="4700016"/>
+            <a:off x="877824" y="4562856"/>
             <a:ext cx="475488" cy="475488"/>
           </a:xfrm>
           <a:prstGeom prst="ellipse">
@@ -26943,7 +26943,7 @@
         </p:blipFill>
         <p:spPr>
           <a:xfrm>
-            <a:off x="6551676" y="4814316"/>
+            <a:off x="992124" y="4677156"/>
             <a:ext cx="228600" cy="228600"/>
           </a:xfrm>
           <a:prstGeom prst="rect">
@@ -26959,8 +26959,8 @@
         </p:nvSpPr>
         <p:spPr>
           <a:xfrm>
-            <a:off x="6437376" y="5266944"/>
-            <a:ext cx="4873752" cy="274320"/>
+            <a:off x="877824" y="5129784"/>
+            <a:ext cx="3020568" cy="274320"/>
           </a:xfrm>
           <a:prstGeom prst="rect">
             <a:avLst/>
@@ -26984,6 +26984,334 @@
                 <a:ea typeface="Calibri" pitchFamily="34" charset="-122"/>
                 <a:cs typeface="Calibri" pitchFamily="34" charset="-120"/>
               </a:rPr>
+              <a:t>Times the way people type them</a:t>
+            </a:r>
+            <a:endParaRPr lang="en-US" sz="1400" dirty="0"/>
+          </a:p>
+        </p:txBody>
+      </p:sp>
+      <p:sp>
+        <p:nvSpPr>
+          <p:cNvPr id="24" name="Text 18"/>
+          <p:cNvSpPr txBox="1"/>
+          <p:nvPr/>
+        </p:nvSpPr>
+        <p:spPr>
+          <a:xfrm>
+            <a:off x="877824" y="5413248"/>
+            <a:ext cx="3020568" cy="868680"/>
+          </a:xfrm>
+          <a:prstGeom prst="rect">
+            <a:avLst/>
+          </a:prstGeom>
+          <a:noFill/>
+          <a:ln/>
+        </p:spPr>
+        <p:txBody>
+          <a:bodyPr wrap="square" lIns="0" tIns="0" rIns="0" bIns="0" rtlCol="0" anchor="ctr"/>
+          <a:lstStyle/>
+          <a:p>
+            <a:pPr indent="0" marL="0">
+              <a:lnSpc>
+                <a:spcPts val="1500"/>
+              </a:lnSpc>
+              <a:buNone/>
+            </a:pPr>
+            <a:r>
+              <a:rPr lang="en-US" sz="1100" dirty="0">
+                <a:solidFill>
+                  <a:srgbClr val="55608A"/>
+                </a:solidFill>
+                <a:latin typeface="Calibri" pitchFamily="34" charset="0"/>
+                <a:ea typeface="Calibri" pitchFamily="34" charset="-122"/>
+                <a:cs typeface="Calibri" pitchFamily="34" charset="-120"/>
+              </a:rPr>
+              <a:t>7:30 AM, 7:30am, 07:30, 0730 - all understood. Nobody should have to learn a time format to build a timetable.</a:t>
+            </a:r>
+            <a:endParaRPr lang="en-US" sz="1100" dirty="0"/>
+          </a:p>
+        </p:txBody>
+      </p:sp>
+      <p:sp>
+        <p:nvSpPr>
+          <p:cNvPr id="25" name="Shape 19"/>
+          <p:cNvSpPr/>
+          <p:nvPr/>
+        </p:nvSpPr>
+        <p:spPr>
+          <a:xfrm>
+            <a:off x="4346448" y="4343400"/>
+            <a:ext cx="3496056" cy="2148840"/>
+          </a:xfrm>
+          <a:prstGeom prst="roundRect">
+            <a:avLst>
+              <a:gd name="adj" fmla="val 4255"/>
+            </a:avLst>
+          </a:prstGeom>
+          <a:solidFill>
+            <a:srgbClr val="F3F6FD"/>
+          </a:solidFill>
+          <a:ln w="9525">
+            <a:solidFill>
+              <a:srgbClr val="DCE4F5"/>
+            </a:solidFill>
+            <a:prstDash val="solid"/>
+          </a:ln>
+          <a:effectLst>
+            <a:outerShdw sx="100000" sy="100000" kx="0" ky="0" algn="bl" rotWithShape="0" blurRad="127000" dist="25400" dir="5400000">
+              <a:srgbClr val="1E2761">
+                <a:alpha val="10000"/>
+              </a:srgbClr>
+            </a:outerShdw>
+          </a:effectLst>
+        </p:spPr>
+      </p:sp>
+      <p:sp>
+        <p:nvSpPr>
+          <p:cNvPr id="26" name="Shape 20"/>
+          <p:cNvSpPr/>
+          <p:nvPr/>
+        </p:nvSpPr>
+        <p:spPr>
+          <a:xfrm>
+            <a:off x="4584192" y="4562856"/>
+            <a:ext cx="475488" cy="475488"/>
+          </a:xfrm>
+          <a:prstGeom prst="ellipse">
+            <a:avLst/>
+          </a:prstGeom>
+          <a:solidFill>
+            <a:srgbClr val="1E2761"/>
+          </a:solidFill>
+          <a:ln w="12700">
+            <a:solidFill>
+              <a:srgbClr val="1E2761"/>
+            </a:solidFill>
+            <a:prstDash val="solid"/>
+          </a:ln>
+        </p:spPr>
+      </p:sp>
+      <p:pic>
+        <p:nvPicPr>
+          <p:cNvPr id="27" name="Image 4" descr="preencoded.png">    </p:cNvPr>
+          <p:cNvPicPr>
+            <a:picLocks noChangeAspect="1"/>
+          </p:cNvPicPr>
+          <p:nvPr/>
+        </p:nvPicPr>
+        <p:blipFill>
+          <a:blip r:embed="rId5"/>
+          <a:stretch>
+            <a:fillRect/>
+          </a:stretch>
+        </p:blipFill>
+        <p:spPr>
+          <a:xfrm>
+            <a:off x="4698492" y="4677156"/>
+            <a:ext cx="228600" cy="228600"/>
+          </a:xfrm>
+          <a:prstGeom prst="rect">
+            <a:avLst/>
+          </a:prstGeom>
+        </p:spPr>
+      </p:pic>
+      <p:sp>
+        <p:nvSpPr>
+          <p:cNvPr id="28" name="Text 21"/>
+          <p:cNvSpPr txBox="1"/>
+          <p:nvPr/>
+        </p:nvSpPr>
+        <p:spPr>
+          <a:xfrm>
+            <a:off x="4584192" y="5129784"/>
+            <a:ext cx="3020568" cy="274320"/>
+          </a:xfrm>
+          <a:prstGeom prst="rect">
+            <a:avLst/>
+          </a:prstGeom>
+          <a:noFill/>
+          <a:ln/>
+        </p:spPr>
+        <p:txBody>
+          <a:bodyPr wrap="square" lIns="0" tIns="0" rIns="0" bIns="0" rtlCol="0" anchor="ctr"/>
+          <a:lstStyle/>
+          <a:p>
+            <a:pPr indent="0" marL="0">
+              <a:buNone/>
+            </a:pPr>
+            <a:r>
+              <a:rPr lang="en-US" sz="1400" b="1" dirty="0">
+                <a:solidFill>
+                  <a:srgbClr val="1E2761"/>
+                </a:solidFill>
+                <a:latin typeface="Calibri" pitchFamily="34" charset="0"/>
+                <a:ea typeface="Calibri" pitchFamily="34" charset="-122"/>
+                <a:cs typeface="Calibri" pitchFamily="34" charset="-120"/>
+              </a:rPr>
+              <a:t>Printed as a grid</a:t>
+            </a:r>
+            <a:endParaRPr lang="en-US" sz="1400" dirty="0"/>
+          </a:p>
+        </p:txBody>
+      </p:sp>
+      <p:sp>
+        <p:nvSpPr>
+          <p:cNvPr id="29" name="Text 22"/>
+          <p:cNvSpPr txBox="1"/>
+          <p:nvPr/>
+        </p:nvSpPr>
+        <p:spPr>
+          <a:xfrm>
+            <a:off x="4584192" y="5413248"/>
+            <a:ext cx="3020568" cy="868680"/>
+          </a:xfrm>
+          <a:prstGeom prst="rect">
+            <a:avLst/>
+          </a:prstGeom>
+          <a:noFill/>
+          <a:ln/>
+        </p:spPr>
+        <p:txBody>
+          <a:bodyPr wrap="square" lIns="0" tIns="0" rIns="0" bIns="0" rtlCol="0" anchor="ctr"/>
+          <a:lstStyle/>
+          <a:p>
+            <a:pPr indent="0" marL="0">
+              <a:lnSpc>
+                <a:spcPts val="1500"/>
+              </a:lnSpc>
+              <a:buNone/>
+            </a:pPr>
+            <a:r>
+              <a:rPr lang="en-US" sz="1100" dirty="0">
+                <a:solidFill>
+                  <a:srgbClr val="55608A"/>
+                </a:solidFill>
+                <a:latin typeface="Calibri" pitchFamily="34" charset="0"/>
+                <a:ea typeface="Calibri" pitchFamily="34" charset="-122"/>
+                <a:cs typeface="Calibri" pitchFamily="34" charset="-120"/>
+              </a:rPr>
+              <a:t>The week as a wall chart, with the section or the teacher dropped from the cells when it is the same all the way down.</a:t>
+            </a:r>
+            <a:endParaRPr lang="en-US" sz="1100" dirty="0"/>
+          </a:p>
+        </p:txBody>
+      </p:sp>
+      <p:sp>
+        <p:nvSpPr>
+          <p:cNvPr id="30" name="Shape 23"/>
+          <p:cNvSpPr/>
+          <p:nvPr/>
+        </p:nvSpPr>
+        <p:spPr>
+          <a:xfrm>
+            <a:off x="8052816" y="4343400"/>
+            <a:ext cx="3496056" cy="2148840"/>
+          </a:xfrm>
+          <a:prstGeom prst="roundRect">
+            <a:avLst>
+              <a:gd name="adj" fmla="val 4255"/>
+            </a:avLst>
+          </a:prstGeom>
+          <a:solidFill>
+            <a:srgbClr val="F3F6FD"/>
+          </a:solidFill>
+          <a:ln w="9525">
+            <a:solidFill>
+              <a:srgbClr val="DCE4F5"/>
+            </a:solidFill>
+            <a:prstDash val="solid"/>
+          </a:ln>
+          <a:effectLst>
+            <a:outerShdw sx="100000" sy="100000" kx="0" ky="0" algn="bl" rotWithShape="0" blurRad="127000" dist="25400" dir="5400000">
+              <a:srgbClr val="1E2761">
+                <a:alpha val="10000"/>
+              </a:srgbClr>
+            </a:outerShdw>
+          </a:effectLst>
+        </p:spPr>
+      </p:sp>
+      <p:sp>
+        <p:nvSpPr>
+          <p:cNvPr id="31" name="Shape 24"/>
+          <p:cNvSpPr/>
+          <p:nvPr/>
+        </p:nvSpPr>
+        <p:spPr>
+          <a:xfrm>
+            <a:off x="8290560" y="4562856"/>
+            <a:ext cx="475488" cy="475488"/>
+          </a:xfrm>
+          <a:prstGeom prst="ellipse">
+            <a:avLst/>
+          </a:prstGeom>
+          <a:solidFill>
+            <a:srgbClr val="1E2761"/>
+          </a:solidFill>
+          <a:ln w="12700">
+            <a:solidFill>
+              <a:srgbClr val="1E2761"/>
+            </a:solidFill>
+            <a:prstDash val="solid"/>
+          </a:ln>
+        </p:spPr>
+      </p:sp>
+      <p:pic>
+        <p:nvPicPr>
+          <p:cNvPr id="32" name="Image 5" descr="preencoded.png">    </p:cNvPr>
+          <p:cNvPicPr>
+            <a:picLocks noChangeAspect="1"/>
+          </p:cNvPicPr>
+          <p:nvPr/>
+        </p:nvPicPr>
+        <p:blipFill>
+          <a:blip r:embed="rId6"/>
+          <a:stretch>
+            <a:fillRect/>
+          </a:stretch>
+        </p:blipFill>
+        <p:spPr>
+          <a:xfrm>
+            <a:off x="8404860" y="4677156"/>
+            <a:ext cx="228600" cy="228600"/>
+          </a:xfrm>
+          <a:prstGeom prst="rect">
+            <a:avLst/>
+          </a:prstGeom>
+        </p:spPr>
+      </p:pic>
+      <p:sp>
+        <p:nvSpPr>
+          <p:cNvPr id="33" name="Text 25"/>
+          <p:cNvSpPr txBox="1"/>
+          <p:nvPr/>
+        </p:nvSpPr>
+        <p:spPr>
+          <a:xfrm>
+            <a:off x="8290560" y="5129784"/>
+            <a:ext cx="3020568" cy="274320"/>
+          </a:xfrm>
+          <a:prstGeom prst="rect">
+            <a:avLst/>
+          </a:prstGeom>
+          <a:noFill/>
+          <a:ln/>
+        </p:spPr>
+        <p:txBody>
+          <a:bodyPr wrap="square" lIns="0" tIns="0" rIns="0" bIns="0" rtlCol="0" anchor="ctr"/>
+          <a:lstStyle/>
+          <a:p>
+            <a:pPr indent="0" marL="0">
+              <a:buNone/>
+            </a:pPr>
+            <a:r>
+              <a:rPr lang="en-US" sz="1400" b="1" dirty="0">
+                <a:solidFill>
+                  <a:srgbClr val="1E2761"/>
+                </a:solidFill>
+                <a:latin typeface="Calibri" pitchFamily="34" charset="0"/>
+                <a:ea typeface="Calibri" pitchFamily="34" charset="-122"/>
+                <a:cs typeface="Calibri" pitchFamily="34" charset="-120"/>
+              </a:rPr>
               <a:t>Everyone sees their own</a:t>
             </a:r>
             <a:endParaRPr lang="en-US" sz="1400" dirty="0"/>
@@ -26992,14 +27320,14 @@
       </p:sp>
       <p:sp>
         <p:nvSpPr>
-          <p:cNvPr id="24" name="Text 18"/>
-          <p:cNvSpPr txBox="1"/>
-          <p:nvPr/>
-        </p:nvSpPr>
-        <p:spPr>
-          <a:xfrm>
-            <a:off x="6437376" y="5550408"/>
-            <a:ext cx="4873752" cy="822960"/>
+          <p:cNvPr id="34" name="Text 26"/>
+          <p:cNvSpPr txBox="1"/>
+          <p:nvPr/>
+        </p:nvSpPr>
+        <p:spPr>
+          <a:xfrm>
+            <a:off x="8290560" y="5413248"/>
+            <a:ext cx="3020568" cy="868680"/>
           </a:xfrm>
           <a:prstGeom prst="rect">
             <a:avLst/>

--- a/marketing/LogicClass-Demo.pptx
+++ b/marketing/LogicClass-Demo.pptx
@@ -22525,7 +22525,7 @@
                 <a:ea typeface="Calibri" pitchFamily="34" charset="-122"/>
                 <a:cs typeface="Calibri" pitchFamily="34" charset="-120"/>
               </a:rPr>
-              <a:t>Reaches every account it is addressed to - and only those. Whose phone rings is decided on the server, not by a filter on a list</a:t>
+              <a:t>Reaches every account it is addressed to - a role, or one class, and only those. Whose phone rings is decided on the server, not by a filter on a list</a:t>
             </a:r>
             <a:endParaRPr lang="en-US" sz="1000" dirty="0"/>
           </a:p>
@@ -32961,7 +32961,7 @@
                 <a:ea typeface="Calibri" pitchFamily="34" charset="-122"/>
                 <a:cs typeface="Calibri" pitchFamily="34" charset="-120"/>
               </a:rPr>
-              <a:t>An announcement reaches the phones of the roles it was addressed to, even with the app closed.</a:t>
+              <a:t>An announcement reaches the phones of the roles, or the class, it was addressed to, even with the app closed.</a:t>
             </a:r>
             <a:endParaRPr lang="en-US" sz="1100" dirty="0"/>
           </a:p>
@@ -37274,7 +37274,7 @@
                 <a:ea typeface="Calibri" pitchFamily="34" charset="-122"/>
                 <a:cs typeface="Calibri" pitchFamily="34" charset="-120"/>
               </a:rPr>
-              <a:t>Post school or division messages under their own name.</a:t>
+              <a:t>Post school or division messages under their own name, to a role or to one class.</a:t>
             </a:r>
             <a:endParaRPr lang="en-US" sz="1100" dirty="0"/>
           </a:p>

--- a/marketing/LogicClass-Demo.pptx
+++ b/marketing/LogicClass-Demo.pptx
@@ -11149,7 +11149,7 @@
                 <a:ea typeface="Calibri" pitchFamily="34" charset="-122"/>
                 <a:cs typeface="Calibri" pitchFamily="34" charset="-120"/>
               </a:rPr>
-              <a:t>One button that alerts the adviser and the parents</a:t>
+              <a:t>One button that alerts the adviser, guidance, the office and the parents</a:t>
             </a:r>
             <a:endParaRPr lang="en-US" sz="1000" dirty="0"/>
           </a:p>
@@ -22785,7 +22785,7 @@
                 <a:ea typeface="Calibri" pitchFamily="34" charset="-122"/>
                 <a:cs typeface="Calibri" pitchFamily="34" charset="-120"/>
               </a:rPr>
-              <a:t>The class adviser and the student's parents, at high priority, with the app closed</a:t>
+              <a:t>The class adviser, guidance, the office and the student's parents, at high priority, with the app closed</a:t>
             </a:r>
             <a:endParaRPr lang="en-US" sz="1000" dirty="0"/>
           </a:p>

--- a/marketing/LogicClass-Demo.pptx
+++ b/marketing/LogicClass-Demo.pptx
@@ -3443,7 +3443,7 @@
           <a:p>
             <a:r>
               <a:rPr lang="en-US" dirty="0"/>
-              <a:t>The division boundary is enforced in the database rules, not just hidden in the UI - worth saying out loud.</a:t>
+              <a:t>Two things worth saying out loud: the division boundary is enforced in the database rules rather than hidden in the UI, and "oversight, not data entry" is literal - a Principal has no edit buttons on any of these. Same for the Director.</a:t>
             </a:r>
             <a:endParaRPr lang="en-US" dirty="0"/>
           </a:p>
@@ -25142,7 +25142,7 @@
                 <a:ea typeface="Calibri" pitchFamily="34" charset="-122"/>
                 <a:cs typeface="Calibri" pitchFamily="34" charset="-120"/>
               </a:rPr>
-              <a:t>School-wide oversight, approvals, money and audit</a:t>
+              <a:t>School-wide oversight: reads everything, approves, and edits nothing</a:t>
             </a:r>
             <a:endParaRPr lang="en-US" sz="1000" dirty="0"/>
           </a:p>
@@ -34542,7 +34542,7 @@
                 <a:ea typeface="Cambria" pitchFamily="34" charset="-122"/>
                 <a:cs typeface="Cambria" pitchFamily="34" charset="-120"/>
               </a:rPr>
-              <a:t>Every button on the Director's screen</a:t>
+              <a:t>Every screen the head of school opens</a:t>
             </a:r>
             <a:endParaRPr lang="en-US" sz="3200" dirty="0"/>
           </a:p>
@@ -35101,7 +35101,7 @@
                 <a:ea typeface="Calibri" pitchFamily="34" charset="-122"/>
                 <a:cs typeface="Calibri" pitchFamily="34" charset="-120"/>
               </a:rPr>
-              <a:t>The week's timetable for every section, with clash detection</a:t>
+              <a:t>The week's timetable for every section, read across the whole school</a:t>
             </a:r>
             <a:endParaRPr lang="en-US" sz="1000" dirty="0"/>
           </a:p>
@@ -35621,7 +35621,7 @@
                 <a:ea typeface="Calibri" pitchFamily="34" charset="-122"/>
                 <a:cs typeface="Calibri" pitchFamily="34" charset="-120"/>
               </a:rPr>
-              <a:t>Define the fee sets the cashier assesses against</a:t>
+              <a:t>Read the fee sets the cashier assesses against - the Admin defines them</a:t>
             </a:r>
             <a:endParaRPr lang="en-US" sz="1000" dirty="0"/>
           </a:p>
@@ -35751,7 +35751,7 @@
                 <a:ea typeface="Calibri" pitchFamily="34" charset="-122"/>
                 <a:cs typeface="Calibri" pitchFamily="34" charset="-120"/>
               </a:rPr>
-              <a:t>Record school spending by category, or import a spreadsheet of it</a:t>
+              <a:t>Read school spending by category and date. The Admin records it</a:t>
             </a:r>
             <a:endParaRPr lang="en-US" sz="1000" dirty="0"/>
           </a:p>
@@ -35881,7 +35881,7 @@
                 <a:ea typeface="Calibri" pitchFamily="34" charset="-122"/>
                 <a:cs typeface="Calibri" pitchFamily="34" charset="-120"/>
               </a:rPr>
-              <a:t>The list every phone in the school can dial from</a:t>
+              <a:t>The list every phone in the school can dial from, maintained by the Admin</a:t>
             </a:r>
             <a:endParaRPr lang="en-US" sz="1000" dirty="0"/>
           </a:p>
@@ -36782,7 +36782,7 @@
                 <a:ea typeface="Calibri" pitchFamily="34" charset="-122"/>
                 <a:cs typeface="Calibri" pitchFamily="34" charset="-120"/>
               </a:rPr>
-              <a:t>Who teaches which subject in which section, and who advises it.</a:t>
+              <a:t>Who teaches which subject in which section, and who advises it - read.</a:t>
             </a:r>
             <a:endParaRPr lang="en-US" sz="1100" dirty="0"/>
           </a:p>
@@ -37751,7 +37751,7 @@
                 <a:ea typeface="Calibri" pitchFamily="34" charset="-122"/>
                 <a:cs typeface="Calibri" pitchFamily="34" charset="-120"/>
               </a:rPr>
-              <a:t>The operator role: the person who keeps the school configured week to week.</a:t>
+              <a:t>The operator role, and since the Director and Principal became read-only, the only one: everything the school changes week to week is changed from this account.</a:t>
             </a:r>
             <a:endParaRPr lang="en-US" sz="1350" dirty="0"/>
           </a:p>
@@ -37881,7 +37881,7 @@
                 <a:ea typeface="Calibri" pitchFamily="34" charset="-122"/>
                 <a:cs typeface="Calibri" pitchFamily="34" charset="-120"/>
               </a:rPr>
-              <a:t>Create an account for any role, set department, position and division scope</a:t>
+              <a:t>Create a Principal, Registrar, Faculty, Staff or Guidance account, with department, position and division scope</a:t>
             </a:r>
             <a:endParaRPr lang="en-US" sz="1000" dirty="0"/>
           </a:p>

--- a/marketing/LogicClass-Demo.pptx
+++ b/marketing/LogicClass-Demo.pptx
@@ -14883,7 +14883,7 @@
                 <a:ea typeface="Calibri" pitchFamily="34" charset="-122"/>
                 <a:cs typeface="Calibri" pitchFamily="34" charset="-120"/>
               </a:rPr>
-              <a:t>A refund is its own row against the original payment. Director and Admin only, enforced on the server</a:t>
+              <a:t>A refund is its own row against the original payment. The Admin only - never the cashier who took the money - enforced on the server</a:t>
             </a:r>
             <a:endParaRPr lang="en-US" sz="1000" dirty="0"/>
           </a:p>

--- a/marketing/LogicClass-Demo.pptx
+++ b/marketing/LogicClass-Demo.pptx
@@ -9078,7 +9078,7 @@
                 <a:ea typeface="Calibri" pitchFamily="34" charset="-122"/>
                 <a:cs typeface="Calibri" pitchFamily="34" charset="-120"/>
               </a:rPr>
-              <a:t>Counselling notes against one student, by category. The guidance office, the Director and the division Principal - and nobody else, not even the class adviser.</a:t>
+              <a:t>Counselling notes against one student, by category. Guidance, the Director, the Admin and the division Principal - nobody else, not the adviser, not the family.</a:t>
             </a:r>
             <a:endParaRPr lang="en-US" sz="1100" dirty="0"/>
           </a:p>

--- a/marketing/LogicClass-Demo.pptx
+++ b/marketing/LogicClass-Demo.pptx
@@ -31261,7 +31261,7 @@
                 <a:ea typeface="Calibri" pitchFamily="34" charset="-122"/>
                 <a:cs typeface="Calibri" pitchFamily="34" charset="-120"/>
               </a:rPr>
-              <a:t>Schools hold minors' records. The questions a DPO asks are answered inside the app, not in a promise.</a:t>
+              <a:t>Schools hold minors' records. Your DPO asks what is held and who can reach it - and that part is answered inside the app, not in a promise.</a:t>
             </a:r>
             <a:endParaRPr lang="en-US" sz="1350" dirty="0"/>
           </a:p>
@@ -31609,7 +31609,7 @@
                 <a:ea typeface="Calibri" pitchFamily="34" charset="-122"/>
                 <a:cs typeface="Calibri" pitchFamily="34" charset="-120"/>
               </a:rPr>
-              <a:t>Access requests</a:t>
+              <a:t>A retention schedule</a:t>
             </a:r>
             <a:endParaRPr lang="en-US" sz="1250" dirty="0"/>
           </a:p>
@@ -31651,7 +31651,7 @@
                 <a:ea typeface="Calibri" pitchFamily="34" charset="-122"/>
                 <a:cs typeface="Calibri" pitchFamily="34" charset="-120"/>
               </a:rPr>
-              <a:t>A family can ask what is held about their child, from their own profile</a:t>
+              <a:t>How long each kind of record is kept, written down</a:t>
             </a:r>
             <a:endParaRPr lang="en-US" sz="1000" dirty="0"/>
           </a:p>
@@ -31739,7 +31739,7 @@
                 <a:ea typeface="Calibri" pitchFamily="34" charset="-122"/>
                 <a:cs typeface="Calibri" pitchFamily="34" charset="-120"/>
               </a:rPr>
-              <a:t>Correction and objection</a:t>
+              <a:t>Access decided at the database</a:t>
             </a:r>
             <a:endParaRPr lang="en-US" sz="1250" dirty="0"/>
           </a:p>
@@ -31781,7 +31781,7 @@
                 <a:ea typeface="Calibri" pitchFamily="34" charset="-122"/>
                 <a:cs typeface="Calibri" pitchFamily="34" charset="-120"/>
               </a:rPr>
-              <a:t>The other rights the Act names, filed the same way</a:t>
+              <a:t>Not by what a screen shows - a screen you cannot reach is data you cannot fetch</a:t>
             </a:r>
             <a:endParaRPr lang="en-US" sz="1000" dirty="0"/>
           </a:p>
@@ -31869,7 +31869,7 @@
                 <a:ea typeface="Calibri" pitchFamily="34" charset="-122"/>
                 <a:cs typeface="Calibri" pitchFamily="34" charset="-120"/>
               </a:rPr>
-              <a:t>A retention schedule</a:t>
+              <a:t>An audit trail behind it</a:t>
             </a:r>
             <a:endParaRPr lang="en-US" sz="1250" dirty="0"/>
           </a:p>
@@ -31911,7 +31911,7 @@
                 <a:ea typeface="Calibri" pitchFamily="34" charset="-122"/>
                 <a:cs typeface="Calibri" pitchFamily="34" charset="-120"/>
               </a:rPr>
-              <a:t>How long each kind of record is kept, written down</a:t>
+              <a:t>Every change to a record carries who made it and when</a:t>
             </a:r>
             <a:endParaRPr lang="en-US" sz="1000" dirty="0"/>
           </a:p>
@@ -31999,7 +31999,7 @@
                 <a:ea typeface="Calibri" pitchFamily="34" charset="-122"/>
                 <a:cs typeface="Calibri" pitchFamily="34" charset="-120"/>
               </a:rPr>
-              <a:t>A clock on every request</a:t>
+              <a:t>Requests handled at the office</a:t>
             </a:r>
             <a:endParaRPr lang="en-US" sz="1250" dirty="0"/>
           </a:p>
@@ -32041,7 +32041,7 @@
                 <a:ea typeface="Calibri" pitchFamily="34" charset="-122"/>
                 <a:cs typeface="Calibri" pitchFamily="34" charset="-120"/>
               </a:rPr>
-              <a:t>Each one carries a target answer date and shows when it is overdue</a:t>
+              <a:t>Access, correction, erasure and objection are answered by the school, off this system</a:t>
             </a:r>
             <a:endParaRPr lang="en-US" sz="1000" dirty="0"/>
           </a:p>
@@ -34059,7 +34059,7 @@
                 <a:ea typeface="Calibri" pitchFamily="34" charset="-122"/>
                 <a:cs typeface="Calibri" pitchFamily="34" charset="-120"/>
               </a:rPr>
-              <a:t>Name, logo, year, principal and DPO - a warning, not a failure</a:t>
+              <a:t>Name, logo, year and principal - a warning, not a failure</a:t>
             </a:r>
             <a:endParaRPr lang="en-US" sz="1000" dirty="0"/>
           </a:p>
@@ -35319,7 +35319,7 @@
                 <a:ea typeface="Calibri" pitchFamily="34" charset="-122"/>
                 <a:cs typeface="Calibri" pitchFamily="34" charset="-120"/>
               </a:rPr>
-              <a:t>Data Requests</a:t>
+              <a:t>Reports</a:t>
             </a:r>
             <a:endParaRPr lang="en-US" sz="1250" dirty="0"/>
           </a:p>
@@ -35361,7 +35361,7 @@
                 <a:ea typeface="Calibri" pitchFamily="34" charset="-122"/>
                 <a:cs typeface="Calibri" pitchFamily="34" charset="-120"/>
               </a:rPr>
-              <a:t>What families have asked about their data, and what was answered</a:t>
+              <a:t>Enrolment, collections, attendance and grades - on screen, to Excel, or printed</a:t>
             </a:r>
             <a:endParaRPr lang="en-US" sz="1000" dirty="0"/>
           </a:p>
@@ -35449,7 +35449,7 @@
                 <a:ea typeface="Calibri" pitchFamily="34" charset="-122"/>
                 <a:cs typeface="Calibri" pitchFamily="34" charset="-120"/>
               </a:rPr>
-              <a:t>Reports</a:t>
+              <a:t>Fee Schedules</a:t>
             </a:r>
             <a:endParaRPr lang="en-US" sz="1250" dirty="0"/>
           </a:p>
@@ -35491,7 +35491,7 @@
                 <a:ea typeface="Calibri" pitchFamily="34" charset="-122"/>
                 <a:cs typeface="Calibri" pitchFamily="34" charset="-120"/>
               </a:rPr>
-              <a:t>Enrolment, collections, attendance and grades - on screen, to Excel, or printed</a:t>
+              <a:t>Read the fee sets the cashier assesses against - the Admin defines them</a:t>
             </a:r>
             <a:endParaRPr lang="en-US" sz="1000" dirty="0"/>
           </a:p>
@@ -35579,7 +35579,7 @@
                 <a:ea typeface="Calibri" pitchFamily="34" charset="-122"/>
                 <a:cs typeface="Calibri" pitchFamily="34" charset="-120"/>
               </a:rPr>
-              <a:t>Fee Schedules</a:t>
+              <a:t>Expenses</a:t>
             </a:r>
             <a:endParaRPr lang="en-US" sz="1250" dirty="0"/>
           </a:p>
@@ -35621,7 +35621,7 @@
                 <a:ea typeface="Calibri" pitchFamily="34" charset="-122"/>
                 <a:cs typeface="Calibri" pitchFamily="34" charset="-120"/>
               </a:rPr>
-              <a:t>Read the fee sets the cashier assesses against - the Admin defines them</a:t>
+              <a:t>Read school spending by category and date. The Admin records it</a:t>
             </a:r>
             <a:endParaRPr lang="en-US" sz="1000" dirty="0"/>
           </a:p>
@@ -35709,7 +35709,7 @@
                 <a:ea typeface="Calibri" pitchFamily="34" charset="-122"/>
                 <a:cs typeface="Calibri" pitchFamily="34" charset="-120"/>
               </a:rPr>
-              <a:t>Expenses</a:t>
+              <a:t>Emergency Numbers</a:t>
             </a:r>
             <a:endParaRPr lang="en-US" sz="1250" dirty="0"/>
           </a:p>
@@ -35751,7 +35751,7 @@
                 <a:ea typeface="Calibri" pitchFamily="34" charset="-122"/>
                 <a:cs typeface="Calibri" pitchFamily="34" charset="-120"/>
               </a:rPr>
-              <a:t>Read school spending by category and date. The Admin records it</a:t>
+              <a:t>The list every phone in the school can dial from, maintained by the Admin</a:t>
             </a:r>
             <a:endParaRPr lang="en-US" sz="1000" dirty="0"/>
           </a:p>
@@ -35839,7 +35839,7 @@
                 <a:ea typeface="Calibri" pitchFamily="34" charset="-122"/>
                 <a:cs typeface="Calibri" pitchFamily="34" charset="-120"/>
               </a:rPr>
-              <a:t>Emergency Numbers</a:t>
+              <a:t>Audit Trail</a:t>
             </a:r>
             <a:endParaRPr lang="en-US" sz="1250" dirty="0"/>
           </a:p>
@@ -35881,7 +35881,7 @@
                 <a:ea typeface="Calibri" pitchFamily="34" charset="-122"/>
                 <a:cs typeface="Calibri" pitchFamily="34" charset="-120"/>
               </a:rPr>
-              <a:t>The list every phone in the school can dial from, maintained by the Admin</a:t>
+              <a:t>Every change made in the school, filterable by module and date</a:t>
             </a:r>
             <a:endParaRPr lang="en-US" sz="1000" dirty="0"/>
           </a:p>
@@ -35969,7 +35969,7 @@
                 <a:ea typeface="Calibri" pitchFamily="34" charset="-122"/>
                 <a:cs typeface="Calibri" pitchFamily="34" charset="-120"/>
               </a:rPr>
-              <a:t>Audit Trail</a:t>
+              <a:t>My Activity</a:t>
             </a:r>
             <a:endParaRPr lang="en-US" sz="1250" dirty="0"/>
           </a:p>
@@ -35984,136 +35984,6 @@
         <p:spPr>
           <a:xfrm>
             <a:off x="6835140" y="4850892"/>
-            <a:ext cx="4713732" cy="365760"/>
-          </a:xfrm>
-          <a:prstGeom prst="rect">
-            <a:avLst/>
-          </a:prstGeom>
-          <a:noFill/>
-          <a:ln/>
-        </p:spPr>
-        <p:txBody>
-          <a:bodyPr wrap="square" lIns="0" tIns="0" rIns="0" bIns="0" rtlCol="0" anchor="ctr"/>
-          <a:lstStyle/>
-          <a:p>
-            <a:pPr indent="0" marL="0">
-              <a:lnSpc>
-                <a:spcPts val="1250"/>
-              </a:lnSpc>
-              <a:buNone/>
-            </a:pPr>
-            <a:r>
-              <a:rPr lang="en-US" sz="1000" dirty="0">
-                <a:solidFill>
-                  <a:srgbClr val="55608A"/>
-                </a:solidFill>
-                <a:latin typeface="Calibri" pitchFamily="34" charset="0"/>
-                <a:ea typeface="Calibri" pitchFamily="34" charset="-122"/>
-                <a:cs typeface="Calibri" pitchFamily="34" charset="-120"/>
-              </a:rPr>
-              <a:t>Every change made in the school, filterable by module and date</a:t>
-            </a:r>
-            <a:endParaRPr lang="en-US" sz="1000" dirty="0"/>
-          </a:p>
-        </p:txBody>
-      </p:sp>
-      <p:sp>
-        <p:nvSpPr>
-          <p:cNvPr id="49" name="Shape 36"/>
-          <p:cNvSpPr/>
-          <p:nvPr/>
-        </p:nvSpPr>
-        <p:spPr>
-          <a:xfrm>
-            <a:off x="6323076" y="5340096"/>
-            <a:ext cx="384048" cy="384048"/>
-          </a:xfrm>
-          <a:prstGeom prst="ellipse">
-            <a:avLst/>
-          </a:prstGeom>
-          <a:solidFill>
-            <a:srgbClr val="CADCFC"/>
-          </a:solidFill>
-          <a:ln w="12700">
-            <a:solidFill>
-              <a:srgbClr val="CADCFC"/>
-            </a:solidFill>
-            <a:prstDash val="solid"/>
-          </a:ln>
-        </p:spPr>
-      </p:sp>
-      <p:pic>
-        <p:nvPicPr>
-          <p:cNvPr id="50" name="Image 11" descr="preencoded.png">    </p:cNvPr>
-          <p:cNvPicPr>
-            <a:picLocks noChangeAspect="1"/>
-          </p:cNvPicPr>
-          <p:nvPr/>
-        </p:nvPicPr>
-        <p:blipFill>
-          <a:blip r:embed="rId12"/>
-          <a:stretch>
-            <a:fillRect/>
-          </a:stretch>
-        </p:blipFill>
-        <p:spPr>
-          <a:xfrm>
-            <a:off x="6428232" y="5445252"/>
-            <a:ext cx="173736" cy="173736"/>
-          </a:xfrm>
-          <a:prstGeom prst="rect">
-            <a:avLst/>
-          </a:prstGeom>
-        </p:spPr>
-      </p:pic>
-      <p:sp>
-        <p:nvSpPr>
-          <p:cNvPr id="51" name="Text 37"/>
-          <p:cNvSpPr txBox="1"/>
-          <p:nvPr/>
-        </p:nvSpPr>
-        <p:spPr>
-          <a:xfrm>
-            <a:off x="6835140" y="5285232"/>
-            <a:ext cx="4713732" cy="237744"/>
-          </a:xfrm>
-          <a:prstGeom prst="rect">
-            <a:avLst/>
-          </a:prstGeom>
-          <a:noFill/>
-          <a:ln/>
-        </p:spPr>
-        <p:txBody>
-          <a:bodyPr wrap="square" lIns="0" tIns="0" rIns="0" bIns="0" rtlCol="0" anchor="ctr"/>
-          <a:lstStyle/>
-          <a:p>
-            <a:pPr indent="0" marL="0">
-              <a:buNone/>
-            </a:pPr>
-            <a:r>
-              <a:rPr lang="en-US" sz="1250" b="1" dirty="0">
-                <a:solidFill>
-                  <a:srgbClr val="1E2761"/>
-                </a:solidFill>
-                <a:latin typeface="Calibri" pitchFamily="34" charset="0"/>
-                <a:ea typeface="Calibri" pitchFamily="34" charset="-122"/>
-                <a:cs typeface="Calibri" pitchFamily="34" charset="-120"/>
-              </a:rPr>
-              <a:t>My Activity</a:t>
-            </a:r>
-            <a:endParaRPr lang="en-US" sz="1250" dirty="0"/>
-          </a:p>
-        </p:txBody>
-      </p:sp>
-      <p:sp>
-        <p:nvSpPr>
-          <p:cNvPr id="52" name="Text 38"/>
-          <p:cNvSpPr txBox="1"/>
-          <p:nvPr/>
-        </p:nvSpPr>
-        <p:spPr>
-          <a:xfrm>
-            <a:off x="6835140" y="5518404"/>
             <a:ext cx="4713732" cy="365760"/>
           </a:xfrm>
           <a:prstGeom prst="rect">
@@ -39808,7 +39678,7 @@
                 <a:ea typeface="Calibri" pitchFamily="34" charset="-122"/>
                 <a:cs typeface="Calibri" pitchFamily="34" charset="-120"/>
               </a:rPr>
-              <a:t>Data Requests</a:t>
+              <a:t>Audit Trail</a:t>
             </a:r>
             <a:endParaRPr lang="en-US" sz="1250" dirty="0"/>
           </a:p>
@@ -39850,7 +39720,7 @@
                 <a:ea typeface="Calibri" pitchFamily="34" charset="-122"/>
                 <a:cs typeface="Calibri" pitchFamily="34" charset="-120"/>
               </a:rPr>
-              <a:t>Answer a family asking what is held about their child</a:t>
+              <a:t>Filter every change by module, date and person</a:t>
             </a:r>
             <a:endParaRPr lang="en-US" sz="1000" dirty="0"/>
           </a:p>
@@ -39938,7 +39808,7 @@
                 <a:ea typeface="Calibri" pitchFamily="34" charset="-122"/>
                 <a:cs typeface="Calibri" pitchFamily="34" charset="-120"/>
               </a:rPr>
-              <a:t>Audit Trail</a:t>
+              <a:t>System Check</a:t>
             </a:r>
             <a:endParaRPr lang="en-US" sz="1250" dirty="0"/>
           </a:p>
@@ -39980,7 +39850,7 @@
                 <a:ea typeface="Calibri" pitchFamily="34" charset="-122"/>
                 <a:cs typeface="Calibri" pitchFamily="34" charset="-120"/>
               </a:rPr>
-              <a:t>Filter every change by module, date and person</a:t>
+              <a:t>Prove the deployment works before the first school day</a:t>
             </a:r>
             <a:endParaRPr lang="en-US" sz="1000" dirty="0"/>
           </a:p>
@@ -40068,7 +39938,7 @@
                 <a:ea typeface="Calibri" pitchFamily="34" charset="-122"/>
                 <a:cs typeface="Calibri" pitchFamily="34" charset="-120"/>
               </a:rPr>
-              <a:t>System Check</a:t>
+              <a:t>Profile</a:t>
             </a:r>
             <a:endParaRPr lang="en-US" sz="1250" dirty="0"/>
           </a:p>
@@ -40083,136 +39953,6 @@
         <p:spPr>
           <a:xfrm>
             <a:off x="6835140" y="4448556"/>
-            <a:ext cx="4713732" cy="365760"/>
-          </a:xfrm>
-          <a:prstGeom prst="rect">
-            <a:avLst/>
-          </a:prstGeom>
-          <a:noFill/>
-          <a:ln/>
-        </p:spPr>
-        <p:txBody>
-          <a:bodyPr wrap="square" lIns="0" tIns="0" rIns="0" bIns="0" rtlCol="0" anchor="ctr"/>
-          <a:lstStyle/>
-          <a:p>
-            <a:pPr indent="0" marL="0">
-              <a:lnSpc>
-                <a:spcPts val="1250"/>
-              </a:lnSpc>
-              <a:buNone/>
-            </a:pPr>
-            <a:r>
-              <a:rPr lang="en-US" sz="1000" dirty="0">
-                <a:solidFill>
-                  <a:srgbClr val="55608A"/>
-                </a:solidFill>
-                <a:latin typeface="Calibri" pitchFamily="34" charset="0"/>
-                <a:ea typeface="Calibri" pitchFamily="34" charset="-122"/>
-                <a:cs typeface="Calibri" pitchFamily="34" charset="-120"/>
-              </a:rPr>
-              <a:t>Prove the deployment works before the first school day</a:t>
-            </a:r>
-            <a:endParaRPr lang="en-US" sz="1000" dirty="0"/>
-          </a:p>
-        </p:txBody>
-      </p:sp>
-      <p:sp>
-        <p:nvSpPr>
-          <p:cNvPr id="41" name="Shape 30"/>
-          <p:cNvSpPr/>
-          <p:nvPr/>
-        </p:nvSpPr>
-        <p:spPr>
-          <a:xfrm>
-            <a:off x="6323076" y="5056632"/>
-            <a:ext cx="384048" cy="384048"/>
-          </a:xfrm>
-          <a:prstGeom prst="ellipse">
-            <a:avLst/>
-          </a:prstGeom>
-          <a:solidFill>
-            <a:srgbClr val="CADCFC"/>
-          </a:solidFill>
-          <a:ln w="12700">
-            <a:solidFill>
-              <a:srgbClr val="CADCFC"/>
-            </a:solidFill>
-            <a:prstDash val="solid"/>
-          </a:ln>
-        </p:spPr>
-      </p:sp>
-      <p:pic>
-        <p:nvPicPr>
-          <p:cNvPr id="42" name="Image 9" descr="preencoded.png">    </p:cNvPr>
-          <p:cNvPicPr>
-            <a:picLocks noChangeAspect="1"/>
-          </p:cNvPicPr>
-          <p:nvPr/>
-        </p:nvPicPr>
-        <p:blipFill>
-          <a:blip r:embed="rId10"/>
-          <a:stretch>
-            <a:fillRect/>
-          </a:stretch>
-        </p:blipFill>
-        <p:spPr>
-          <a:xfrm>
-            <a:off x="6428232" y="5161788"/>
-            <a:ext cx="173736" cy="173736"/>
-          </a:xfrm>
-          <a:prstGeom prst="rect">
-            <a:avLst/>
-          </a:prstGeom>
-        </p:spPr>
-      </p:pic>
-      <p:sp>
-        <p:nvSpPr>
-          <p:cNvPr id="43" name="Text 31"/>
-          <p:cNvSpPr txBox="1"/>
-          <p:nvPr/>
-        </p:nvSpPr>
-        <p:spPr>
-          <a:xfrm>
-            <a:off x="6835140" y="5001768"/>
-            <a:ext cx="4713732" cy="237744"/>
-          </a:xfrm>
-          <a:prstGeom prst="rect">
-            <a:avLst/>
-          </a:prstGeom>
-          <a:noFill/>
-          <a:ln/>
-        </p:spPr>
-        <p:txBody>
-          <a:bodyPr wrap="square" lIns="0" tIns="0" rIns="0" bIns="0" rtlCol="0" anchor="ctr"/>
-          <a:lstStyle/>
-          <a:p>
-            <a:pPr indent="0" marL="0">
-              <a:buNone/>
-            </a:pPr>
-            <a:r>
-              <a:rPr lang="en-US" sz="1250" b="1" dirty="0">
-                <a:solidFill>
-                  <a:srgbClr val="1E2761"/>
-                </a:solidFill>
-                <a:latin typeface="Calibri" pitchFamily="34" charset="0"/>
-                <a:ea typeface="Calibri" pitchFamily="34" charset="-122"/>
-                <a:cs typeface="Calibri" pitchFamily="34" charset="-120"/>
-              </a:rPr>
-              <a:t>Profile</a:t>
-            </a:r>
-            <a:endParaRPr lang="en-US" sz="1250" dirty="0"/>
-          </a:p>
-        </p:txBody>
-      </p:sp>
-      <p:sp>
-        <p:nvSpPr>
-          <p:cNvPr id="44" name="Text 32"/>
-          <p:cNvSpPr txBox="1"/>
-          <p:nvPr/>
-        </p:nvSpPr>
-        <p:spPr>
-          <a:xfrm>
-            <a:off x="6835140" y="5234940"/>
             <a:ext cx="4713732" cy="365760"/>
           </a:xfrm>
           <a:prstGeom prst="rect">
@@ -40675,7 +40415,7 @@
                 <a:ea typeface="Calibri" pitchFamily="34" charset="-122"/>
                 <a:cs typeface="Calibri" pitchFamily="34" charset="-120"/>
               </a:rPr>
-              <a:t>Data Requests</a:t>
+              <a:t>Online Payments</a:t>
             </a:r>
             <a:endParaRPr lang="en-US" sz="1400" dirty="0"/>
           </a:p>
@@ -40717,7 +40457,7 @@
                 <a:ea typeface="Calibri" pitchFamily="34" charset="-122"/>
                 <a:cs typeface="Calibri" pitchFamily="34" charset="-120"/>
               </a:rPr>
-              <a:t>The queue of families asking for access, correction, erasure or objection - each with a target answer date.</a:t>
+              <a:t>The review queue: every GCash or bank transfer a family sent in, with the reference and the amount, to approve or reject.</a:t>
             </a:r>
             <a:endParaRPr lang="en-US" sz="1100" dirty="0"/>
           </a:p>
@@ -40839,7 +40579,7 @@
                 <a:ea typeface="Calibri" pitchFamily="34" charset="-122"/>
                 <a:cs typeface="Calibri" pitchFamily="34" charset="-120"/>
               </a:rPr>
-              <a:t>Online Payments</a:t>
+              <a:t>Payment Setup</a:t>
             </a:r>
             <a:endParaRPr lang="en-US" sz="1400" dirty="0"/>
           </a:p>
@@ -40881,7 +40621,7 @@
                 <a:ea typeface="Calibri" pitchFamily="34" charset="-122"/>
                 <a:cs typeface="Calibri" pitchFamily="34" charset="-120"/>
               </a:rPr>
-              <a:t>The review queue: every GCash or bank transfer a family sent in, with the reference and the amount, to approve or reject.</a:t>
+              <a:t>The school's own account name, number, QR image and the instructions families read before they send anything.</a:t>
             </a:r>
             <a:endParaRPr lang="en-US" sz="1100" dirty="0"/>
           </a:p>
@@ -40889,171 +40629,7 @@
       </p:sp>
       <p:sp>
         <p:nvSpPr>
-          <p:cNvPr id="20" name="Shape 15"/>
-          <p:cNvSpPr/>
-          <p:nvPr/>
-        </p:nvSpPr>
-        <p:spPr>
-          <a:xfrm>
-            <a:off x="8979408" y="2194560"/>
-            <a:ext cx="2569464" cy="2971800"/>
-          </a:xfrm>
-          <a:prstGeom prst="roundRect">
-            <a:avLst>
-              <a:gd name="adj" fmla="val 3559"/>
-            </a:avLst>
-          </a:prstGeom>
-          <a:solidFill>
-            <a:srgbClr val="F3F6FD"/>
-          </a:solidFill>
-          <a:ln w="9525">
-            <a:solidFill>
-              <a:srgbClr val="DCE4F5"/>
-            </a:solidFill>
-            <a:prstDash val="solid"/>
-          </a:ln>
-          <a:effectLst>
-            <a:outerShdw sx="100000" sy="100000" kx="0" ky="0" algn="bl" rotWithShape="0" blurRad="127000" dist="25400" dir="5400000">
-              <a:srgbClr val="1E2761">
-                <a:alpha val="10000"/>
-              </a:srgbClr>
-            </a:outerShdw>
-          </a:effectLst>
-        </p:spPr>
-      </p:sp>
-      <p:sp>
-        <p:nvSpPr>
-          <p:cNvPr id="21" name="Shape 16"/>
-          <p:cNvSpPr/>
-          <p:nvPr/>
-        </p:nvSpPr>
-        <p:spPr>
-          <a:xfrm>
-            <a:off x="9217152" y="2414016"/>
-            <a:ext cx="475488" cy="475488"/>
-          </a:xfrm>
-          <a:prstGeom prst="ellipse">
-            <a:avLst/>
-          </a:prstGeom>
-          <a:solidFill>
-            <a:srgbClr val="1E2761"/>
-          </a:solidFill>
-          <a:ln w="12700">
-            <a:solidFill>
-              <a:srgbClr val="1E2761"/>
-            </a:solidFill>
-            <a:prstDash val="solid"/>
-          </a:ln>
-        </p:spPr>
-      </p:sp>
-      <p:pic>
-        <p:nvPicPr>
-          <p:cNvPr id="22" name="Image 3" descr="preencoded.png">    </p:cNvPr>
-          <p:cNvPicPr>
-            <a:picLocks noChangeAspect="1"/>
-          </p:cNvPicPr>
-          <p:nvPr/>
-        </p:nvPicPr>
-        <p:blipFill>
-          <a:blip r:embed="rId4"/>
-          <a:stretch>
-            <a:fillRect/>
-          </a:stretch>
-        </p:blipFill>
-        <p:spPr>
-          <a:xfrm>
-            <a:off x="9331452" y="2528316"/>
-            <a:ext cx="228600" cy="228600"/>
-          </a:xfrm>
-          <a:prstGeom prst="rect">
-            <a:avLst/>
-          </a:prstGeom>
-        </p:spPr>
-      </p:pic>
-      <p:sp>
-        <p:nvSpPr>
-          <p:cNvPr id="23" name="Text 17"/>
-          <p:cNvSpPr txBox="1"/>
-          <p:nvPr/>
-        </p:nvSpPr>
-        <p:spPr>
-          <a:xfrm>
-            <a:off x="9217152" y="2980944"/>
-            <a:ext cx="2093976" cy="274320"/>
-          </a:xfrm>
-          <a:prstGeom prst="rect">
-            <a:avLst/>
-          </a:prstGeom>
-          <a:noFill/>
-          <a:ln/>
-        </p:spPr>
-        <p:txBody>
-          <a:bodyPr wrap="square" lIns="0" tIns="0" rIns="0" bIns="0" rtlCol="0" anchor="ctr"/>
-          <a:lstStyle/>
-          <a:p>
-            <a:pPr indent="0" marL="0">
-              <a:buNone/>
-            </a:pPr>
-            <a:r>
-              <a:rPr lang="en-US" sz="1400" b="1" dirty="0">
-                <a:solidFill>
-                  <a:srgbClr val="1E2761"/>
-                </a:solidFill>
-                <a:latin typeface="Calibri" pitchFamily="34" charset="0"/>
-                <a:ea typeface="Calibri" pitchFamily="34" charset="-122"/>
-                <a:cs typeface="Calibri" pitchFamily="34" charset="-120"/>
-              </a:rPr>
-              <a:t>Payment Setup</a:t>
-            </a:r>
-            <a:endParaRPr lang="en-US" sz="1400" dirty="0"/>
-          </a:p>
-        </p:txBody>
-      </p:sp>
-      <p:sp>
-        <p:nvSpPr>
-          <p:cNvPr id="24" name="Text 18"/>
-          <p:cNvSpPr txBox="1"/>
-          <p:nvPr/>
-        </p:nvSpPr>
-        <p:spPr>
-          <a:xfrm>
-            <a:off x="9217152" y="3264408"/>
-            <a:ext cx="2093976" cy="1691640"/>
-          </a:xfrm>
-          <a:prstGeom prst="rect">
-            <a:avLst/>
-          </a:prstGeom>
-          <a:noFill/>
-          <a:ln/>
-        </p:spPr>
-        <p:txBody>
-          <a:bodyPr wrap="square" lIns="0" tIns="0" rIns="0" bIns="0" rtlCol="0" anchor="ctr"/>
-          <a:lstStyle/>
-          <a:p>
-            <a:pPr indent="0" marL="0">
-              <a:lnSpc>
-                <a:spcPts val="1500"/>
-              </a:lnSpc>
-              <a:buNone/>
-            </a:pPr>
-            <a:r>
-              <a:rPr lang="en-US" sz="1100" dirty="0">
-                <a:solidFill>
-                  <a:srgbClr val="55608A"/>
-                </a:solidFill>
-                <a:latin typeface="Calibri" pitchFamily="34" charset="0"/>
-                <a:ea typeface="Calibri" pitchFamily="34" charset="-122"/>
-                <a:cs typeface="Calibri" pitchFamily="34" charset="-120"/>
-              </a:rPr>
-              <a:t>The school's own account name, number, QR image and the instructions families read before they send anything.</a:t>
-            </a:r>
-            <a:endParaRPr lang="en-US" sz="1100" dirty="0"/>
-          </a:p>
-        </p:txBody>
-      </p:sp>
-      <p:sp>
-        <p:nvSpPr>
-          <p:cNvPr id="25" name="Text 19"/>
+          <p:cNvPr id="20" name="Text 15"/>
           <p:cNvSpPr txBox="1"/>
           <p:nvPr/>
         </p:nvSpPr>

--- a/marketing/LogicClass-Demo.pptx
+++ b/marketing/LogicClass-Demo.pptx
@@ -8601,7 +8601,7 @@
                 <a:ea typeface="Calibri" pitchFamily="34" charset="-122"/>
                 <a:cs typeface="Calibri" pitchFamily="34" charset="-120"/>
               </a:rPr>
-              <a:t>In week two of a quarter no exam has been given. The grade is rescaled out of the weight that exists and names what is still missing, rather than capping every child at 80.</a:t>
+              <a:t>In week two of a quarter no exam has been given. The grade is rescaled out of the weight that exists rather than capping every child at 80 - and the subject is marked INC until the component is filled, so a working figure is never mistaken for a final grade.</a:t>
             </a:r>
             <a:endParaRPr lang="en-US" sz="1100" dirty="0"/>
           </a:p>

--- a/marketing/LogicClass-Demo.pptx
+++ b/marketing/LogicClass-Demo.pptx
@@ -3355,7 +3355,7 @@
           <a:p>
             <a:r>
               <a:rPr lang="en-US" dirty="0"/>
-              <a:t>This is the slide that answers "can the head of school see everything?" - yes, including who changed what.</a:t>
+              <a:t>This is the slide that answers "can the head of school see everything?" - yes. What they cannot do is change it; that is the Admin, two slides on.</a:t>
             </a:r>
             <a:endParaRPr lang="en-US" dirty="0"/>
           </a:p>
@@ -3619,7 +3619,7 @@
           <a:p>
             <a:r>
               <a:rPr lang="en-US" dirty="0"/>
-              <a:t>Admin is the operator role - the person who keeps the school configured week to week.</a:t>
+              <a:t>Admin is the operator role - the person who keeps the school configured week to week. Which is why an Admin can create another one: the office is a department, not one person's login.</a:t>
             </a:r>
             <a:endParaRPr lang="en-US" dirty="0"/>
           </a:p>
@@ -31911,7 +31911,7 @@
                 <a:ea typeface="Calibri" pitchFamily="34" charset="-122"/>
                 <a:cs typeface="Calibri" pitchFamily="34" charset="-120"/>
               </a:rPr>
-              <a:t>Every change to a record carries who made it and when</a:t>
+              <a:t>Every change to a record carries who made it and when, written automatically</a:t>
             </a:r>
             <a:endParaRPr lang="en-US" sz="1000" dirty="0"/>
           </a:p>
@@ -35189,7 +35189,7 @@
                 <a:ea typeface="Calibri" pitchFamily="34" charset="-122"/>
                 <a:cs typeface="Calibri" pitchFamily="34" charset="-120"/>
               </a:rPr>
-              <a:t>System Check</a:t>
+              <a:t>Reports</a:t>
             </a:r>
             <a:endParaRPr lang="en-US" sz="1250" dirty="0"/>
           </a:p>
@@ -35231,7 +35231,7 @@
                 <a:ea typeface="Calibri" pitchFamily="34" charset="-122"/>
                 <a:cs typeface="Calibri" pitchFamily="34" charset="-120"/>
               </a:rPr>
-              <a:t>Seven readiness checks before a school goes live</a:t>
+              <a:t>Enrolment, collections, attendance and grades - on screen, to Excel, or printed</a:t>
             </a:r>
             <a:endParaRPr lang="en-US" sz="1000" dirty="0"/>
           </a:p>
@@ -35245,7 +35245,7 @@
         </p:nvSpPr>
         <p:spPr>
           <a:xfrm>
-            <a:off x="640080" y="5340096"/>
+            <a:off x="6323076" y="2002536"/>
             <a:ext cx="384048" cy="384048"/>
           </a:xfrm>
           <a:prstGeom prst="ellipse">
@@ -35278,7 +35278,7 @@
         </p:blipFill>
         <p:spPr>
           <a:xfrm>
-            <a:off x="745236" y="5445252"/>
+            <a:off x="6428232" y="2107692"/>
             <a:ext cx="173736" cy="173736"/>
           </a:xfrm>
           <a:prstGeom prst="rect">
@@ -35294,7 +35294,7 @@
         </p:nvSpPr>
         <p:spPr>
           <a:xfrm>
-            <a:off x="1152144" y="5285232"/>
+            <a:off x="6835140" y="1947672"/>
             <a:ext cx="4713732" cy="237744"/>
           </a:xfrm>
           <a:prstGeom prst="rect">
@@ -35319,7 +35319,7 @@
                 <a:ea typeface="Calibri" pitchFamily="34" charset="-122"/>
                 <a:cs typeface="Calibri" pitchFamily="34" charset="-120"/>
               </a:rPr>
-              <a:t>Reports</a:t>
+              <a:t>Fee Schedules</a:t>
             </a:r>
             <a:endParaRPr lang="en-US" sz="1250" dirty="0"/>
           </a:p>
@@ -35333,7 +35333,7 @@
         </p:nvSpPr>
         <p:spPr>
           <a:xfrm>
-            <a:off x="1152144" y="5518404"/>
+            <a:off x="6835140" y="2180844"/>
             <a:ext cx="4713732" cy="365760"/>
           </a:xfrm>
           <a:prstGeom prst="rect">
@@ -35361,7 +35361,7 @@
                 <a:ea typeface="Calibri" pitchFamily="34" charset="-122"/>
                 <a:cs typeface="Calibri" pitchFamily="34" charset="-120"/>
               </a:rPr>
-              <a:t>Enrolment, collections, attendance and grades - on screen, to Excel, or printed</a:t>
+              <a:t>Read the fee sets the cashier assesses against - the Admin defines them</a:t>
             </a:r>
             <a:endParaRPr lang="en-US" sz="1000" dirty="0"/>
           </a:p>
@@ -35375,7 +35375,7 @@
         </p:nvSpPr>
         <p:spPr>
           <a:xfrm>
-            <a:off x="6323076" y="2002536"/>
+            <a:off x="6323076" y="2670048"/>
             <a:ext cx="384048" cy="384048"/>
           </a:xfrm>
           <a:prstGeom prst="ellipse">
@@ -35408,7 +35408,7 @@
         </p:blipFill>
         <p:spPr>
           <a:xfrm>
-            <a:off x="6428232" y="2107692"/>
+            <a:off x="6428232" y="2775204"/>
             <a:ext cx="173736" cy="173736"/>
           </a:xfrm>
           <a:prstGeom prst="rect">
@@ -35424,7 +35424,7 @@
         </p:nvSpPr>
         <p:spPr>
           <a:xfrm>
-            <a:off x="6835140" y="1947672"/>
+            <a:off x="6835140" y="2615184"/>
             <a:ext cx="4713732" cy="237744"/>
           </a:xfrm>
           <a:prstGeom prst="rect">
@@ -35449,7 +35449,7 @@
                 <a:ea typeface="Calibri" pitchFamily="34" charset="-122"/>
                 <a:cs typeface="Calibri" pitchFamily="34" charset="-120"/>
               </a:rPr>
-              <a:t>Fee Schedules</a:t>
+              <a:t>Expenses</a:t>
             </a:r>
             <a:endParaRPr lang="en-US" sz="1250" dirty="0"/>
           </a:p>
@@ -35463,7 +35463,7 @@
         </p:nvSpPr>
         <p:spPr>
           <a:xfrm>
-            <a:off x="6835140" y="2180844"/>
+            <a:off x="6835140" y="2848356"/>
             <a:ext cx="4713732" cy="365760"/>
           </a:xfrm>
           <a:prstGeom prst="rect">
@@ -35491,7 +35491,7 @@
                 <a:ea typeface="Calibri" pitchFamily="34" charset="-122"/>
                 <a:cs typeface="Calibri" pitchFamily="34" charset="-120"/>
               </a:rPr>
-              <a:t>Read the fee sets the cashier assesses against - the Admin defines them</a:t>
+              <a:t>Read school spending by category and date. The Admin records it</a:t>
             </a:r>
             <a:endParaRPr lang="en-US" sz="1000" dirty="0"/>
           </a:p>
@@ -35505,7 +35505,7 @@
         </p:nvSpPr>
         <p:spPr>
           <a:xfrm>
-            <a:off x="6323076" y="2670048"/>
+            <a:off x="6323076" y="3337560"/>
             <a:ext cx="384048" cy="384048"/>
           </a:xfrm>
           <a:prstGeom prst="ellipse">
@@ -35538,7 +35538,7 @@
         </p:blipFill>
         <p:spPr>
           <a:xfrm>
-            <a:off x="6428232" y="2775204"/>
+            <a:off x="6428232" y="3442716"/>
             <a:ext cx="173736" cy="173736"/>
           </a:xfrm>
           <a:prstGeom prst="rect">
@@ -35554,7 +35554,7 @@
         </p:nvSpPr>
         <p:spPr>
           <a:xfrm>
-            <a:off x="6835140" y="2615184"/>
+            <a:off x="6835140" y="3282696"/>
             <a:ext cx="4713732" cy="237744"/>
           </a:xfrm>
           <a:prstGeom prst="rect">
@@ -35579,7 +35579,7 @@
                 <a:ea typeface="Calibri" pitchFamily="34" charset="-122"/>
                 <a:cs typeface="Calibri" pitchFamily="34" charset="-120"/>
               </a:rPr>
-              <a:t>Expenses</a:t>
+              <a:t>Emergency Numbers</a:t>
             </a:r>
             <a:endParaRPr lang="en-US" sz="1250" dirty="0"/>
           </a:p>
@@ -35593,7 +35593,7 @@
         </p:nvSpPr>
         <p:spPr>
           <a:xfrm>
-            <a:off x="6835140" y="2848356"/>
+            <a:off x="6835140" y="3515868"/>
             <a:ext cx="4713732" cy="365760"/>
           </a:xfrm>
           <a:prstGeom prst="rect">
@@ -35621,7 +35621,7 @@
                 <a:ea typeface="Calibri" pitchFamily="34" charset="-122"/>
                 <a:cs typeface="Calibri" pitchFamily="34" charset="-120"/>
               </a:rPr>
-              <a:t>Read school spending by category and date. The Admin records it</a:t>
+              <a:t>The list every phone in the school can dial from, maintained by the Admin</a:t>
             </a:r>
             <a:endParaRPr lang="en-US" sz="1000" dirty="0"/>
           </a:p>
@@ -35635,7 +35635,7 @@
         </p:nvSpPr>
         <p:spPr>
           <a:xfrm>
-            <a:off x="6323076" y="3337560"/>
+            <a:off x="6323076" y="4005072"/>
             <a:ext cx="384048" cy="384048"/>
           </a:xfrm>
           <a:prstGeom prst="ellipse">
@@ -35668,7 +35668,7 @@
         </p:blipFill>
         <p:spPr>
           <a:xfrm>
-            <a:off x="6428232" y="3442716"/>
+            <a:off x="6428232" y="4110228"/>
             <a:ext cx="173736" cy="173736"/>
           </a:xfrm>
           <a:prstGeom prst="rect">
@@ -35684,7 +35684,7 @@
         </p:nvSpPr>
         <p:spPr>
           <a:xfrm>
-            <a:off x="6835140" y="3282696"/>
+            <a:off x="6835140" y="3950208"/>
             <a:ext cx="4713732" cy="237744"/>
           </a:xfrm>
           <a:prstGeom prst="rect">
@@ -35709,7 +35709,7 @@
                 <a:ea typeface="Calibri" pitchFamily="34" charset="-122"/>
                 <a:cs typeface="Calibri" pitchFamily="34" charset="-120"/>
               </a:rPr>
-              <a:t>Emergency Numbers</a:t>
+              <a:t>Profile</a:t>
             </a:r>
             <a:endParaRPr lang="en-US" sz="1250" dirty="0"/>
           </a:p>
@@ -35723,7 +35723,7 @@
         </p:nvSpPr>
         <p:spPr>
           <a:xfrm>
-            <a:off x="6835140" y="3515868"/>
+            <a:off x="6835140" y="4183380"/>
             <a:ext cx="4713732" cy="365760"/>
           </a:xfrm>
           <a:prstGeom prst="rect">
@@ -35751,267 +35751,7 @@
                 <a:ea typeface="Calibri" pitchFamily="34" charset="-122"/>
                 <a:cs typeface="Calibri" pitchFamily="34" charset="-120"/>
               </a:rPr>
-              <a:t>The list every phone in the school can dial from, maintained by the Admin</a:t>
-            </a:r>
-            <a:endParaRPr lang="en-US" sz="1000" dirty="0"/>
-          </a:p>
-        </p:txBody>
-      </p:sp>
-      <p:sp>
-        <p:nvSpPr>
-          <p:cNvPr id="41" name="Shape 30"/>
-          <p:cNvSpPr/>
-          <p:nvPr/>
-        </p:nvSpPr>
-        <p:spPr>
-          <a:xfrm>
-            <a:off x="6323076" y="4005072"/>
-            <a:ext cx="384048" cy="384048"/>
-          </a:xfrm>
-          <a:prstGeom prst="ellipse">
-            <a:avLst/>
-          </a:prstGeom>
-          <a:solidFill>
-            <a:srgbClr val="CADCFC"/>
-          </a:solidFill>
-          <a:ln w="12700">
-            <a:solidFill>
-              <a:srgbClr val="CADCFC"/>
-            </a:solidFill>
-            <a:prstDash val="solid"/>
-          </a:ln>
-        </p:spPr>
-      </p:sp>
-      <p:pic>
-        <p:nvPicPr>
-          <p:cNvPr id="42" name="Image 9" descr="preencoded.png">    </p:cNvPr>
-          <p:cNvPicPr>
-            <a:picLocks noChangeAspect="1"/>
-          </p:cNvPicPr>
-          <p:nvPr/>
-        </p:nvPicPr>
-        <p:blipFill>
-          <a:blip r:embed="rId10"/>
-          <a:stretch>
-            <a:fillRect/>
-          </a:stretch>
-        </p:blipFill>
-        <p:spPr>
-          <a:xfrm>
-            <a:off x="6428232" y="4110228"/>
-            <a:ext cx="173736" cy="173736"/>
-          </a:xfrm>
-          <a:prstGeom prst="rect">
-            <a:avLst/>
-          </a:prstGeom>
-        </p:spPr>
-      </p:pic>
-      <p:sp>
-        <p:nvSpPr>
-          <p:cNvPr id="43" name="Text 31"/>
-          <p:cNvSpPr txBox="1"/>
-          <p:nvPr/>
-        </p:nvSpPr>
-        <p:spPr>
-          <a:xfrm>
-            <a:off x="6835140" y="3950208"/>
-            <a:ext cx="4713732" cy="237744"/>
-          </a:xfrm>
-          <a:prstGeom prst="rect">
-            <a:avLst/>
-          </a:prstGeom>
-          <a:noFill/>
-          <a:ln/>
-        </p:spPr>
-        <p:txBody>
-          <a:bodyPr wrap="square" lIns="0" tIns="0" rIns="0" bIns="0" rtlCol="0" anchor="ctr"/>
-          <a:lstStyle/>
-          <a:p>
-            <a:pPr indent="0" marL="0">
-              <a:buNone/>
-            </a:pPr>
-            <a:r>
-              <a:rPr lang="en-US" sz="1250" b="1" dirty="0">
-                <a:solidFill>
-                  <a:srgbClr val="1E2761"/>
-                </a:solidFill>
-                <a:latin typeface="Calibri" pitchFamily="34" charset="0"/>
-                <a:ea typeface="Calibri" pitchFamily="34" charset="-122"/>
-                <a:cs typeface="Calibri" pitchFamily="34" charset="-120"/>
-              </a:rPr>
-              <a:t>Audit Trail</a:t>
-            </a:r>
-            <a:endParaRPr lang="en-US" sz="1250" dirty="0"/>
-          </a:p>
-        </p:txBody>
-      </p:sp>
-      <p:sp>
-        <p:nvSpPr>
-          <p:cNvPr id="44" name="Text 32"/>
-          <p:cNvSpPr txBox="1"/>
-          <p:nvPr/>
-        </p:nvSpPr>
-        <p:spPr>
-          <a:xfrm>
-            <a:off x="6835140" y="4183380"/>
-            <a:ext cx="4713732" cy="365760"/>
-          </a:xfrm>
-          <a:prstGeom prst="rect">
-            <a:avLst/>
-          </a:prstGeom>
-          <a:noFill/>
-          <a:ln/>
-        </p:spPr>
-        <p:txBody>
-          <a:bodyPr wrap="square" lIns="0" tIns="0" rIns="0" bIns="0" rtlCol="0" anchor="ctr"/>
-          <a:lstStyle/>
-          <a:p>
-            <a:pPr indent="0" marL="0">
-              <a:lnSpc>
-                <a:spcPts val="1250"/>
-              </a:lnSpc>
-              <a:buNone/>
-            </a:pPr>
-            <a:r>
-              <a:rPr lang="en-US" sz="1000" dirty="0">
-                <a:solidFill>
-                  <a:srgbClr val="55608A"/>
-                </a:solidFill>
-                <a:latin typeface="Calibri" pitchFamily="34" charset="0"/>
-                <a:ea typeface="Calibri" pitchFamily="34" charset="-122"/>
-                <a:cs typeface="Calibri" pitchFamily="34" charset="-120"/>
-              </a:rPr>
-              <a:t>Every change made in the school, filterable by module and date</a:t>
-            </a:r>
-            <a:endParaRPr lang="en-US" sz="1000" dirty="0"/>
-          </a:p>
-        </p:txBody>
-      </p:sp>
-      <p:sp>
-        <p:nvSpPr>
-          <p:cNvPr id="45" name="Shape 33"/>
-          <p:cNvSpPr/>
-          <p:nvPr/>
-        </p:nvSpPr>
-        <p:spPr>
-          <a:xfrm>
-            <a:off x="6323076" y="4672584"/>
-            <a:ext cx="384048" cy="384048"/>
-          </a:xfrm>
-          <a:prstGeom prst="ellipse">
-            <a:avLst/>
-          </a:prstGeom>
-          <a:solidFill>
-            <a:srgbClr val="CADCFC"/>
-          </a:solidFill>
-          <a:ln w="12700">
-            <a:solidFill>
-              <a:srgbClr val="CADCFC"/>
-            </a:solidFill>
-            <a:prstDash val="solid"/>
-          </a:ln>
-        </p:spPr>
-      </p:sp>
-      <p:pic>
-        <p:nvPicPr>
-          <p:cNvPr id="46" name="Image 10" descr="preencoded.png">    </p:cNvPr>
-          <p:cNvPicPr>
-            <a:picLocks noChangeAspect="1"/>
-          </p:cNvPicPr>
-          <p:nvPr/>
-        </p:nvPicPr>
-        <p:blipFill>
-          <a:blip r:embed="rId11"/>
-          <a:stretch>
-            <a:fillRect/>
-          </a:stretch>
-        </p:blipFill>
-        <p:spPr>
-          <a:xfrm>
-            <a:off x="6428232" y="4777740"/>
-            <a:ext cx="173736" cy="173736"/>
-          </a:xfrm>
-          <a:prstGeom prst="rect">
-            <a:avLst/>
-          </a:prstGeom>
-        </p:spPr>
-      </p:pic>
-      <p:sp>
-        <p:nvSpPr>
-          <p:cNvPr id="47" name="Text 34"/>
-          <p:cNvSpPr txBox="1"/>
-          <p:nvPr/>
-        </p:nvSpPr>
-        <p:spPr>
-          <a:xfrm>
-            <a:off x="6835140" y="4617720"/>
-            <a:ext cx="4713732" cy="237744"/>
-          </a:xfrm>
-          <a:prstGeom prst="rect">
-            <a:avLst/>
-          </a:prstGeom>
-          <a:noFill/>
-          <a:ln/>
-        </p:spPr>
-        <p:txBody>
-          <a:bodyPr wrap="square" lIns="0" tIns="0" rIns="0" bIns="0" rtlCol="0" anchor="ctr"/>
-          <a:lstStyle/>
-          <a:p>
-            <a:pPr indent="0" marL="0">
-              <a:buNone/>
-            </a:pPr>
-            <a:r>
-              <a:rPr lang="en-US" sz="1250" b="1" dirty="0">
-                <a:solidFill>
-                  <a:srgbClr val="1E2761"/>
-                </a:solidFill>
-                <a:latin typeface="Calibri" pitchFamily="34" charset="0"/>
-                <a:ea typeface="Calibri" pitchFamily="34" charset="-122"/>
-                <a:cs typeface="Calibri" pitchFamily="34" charset="-120"/>
-              </a:rPr>
-              <a:t>My Activity</a:t>
-            </a:r>
-            <a:endParaRPr lang="en-US" sz="1250" dirty="0"/>
-          </a:p>
-        </p:txBody>
-      </p:sp>
-      <p:sp>
-        <p:nvSpPr>
-          <p:cNvPr id="48" name="Text 35"/>
-          <p:cNvSpPr txBox="1"/>
-          <p:nvPr/>
-        </p:nvSpPr>
-        <p:spPr>
-          <a:xfrm>
-            <a:off x="6835140" y="4850892"/>
-            <a:ext cx="4713732" cy="365760"/>
-          </a:xfrm>
-          <a:prstGeom prst="rect">
-            <a:avLst/>
-          </a:prstGeom>
-          <a:noFill/>
-          <a:ln/>
-        </p:spPr>
-        <p:txBody>
-          <a:bodyPr wrap="square" lIns="0" tIns="0" rIns="0" bIns="0" rtlCol="0" anchor="ctr"/>
-          <a:lstStyle/>
-          <a:p>
-            <a:pPr indent="0" marL="0">
-              <a:lnSpc>
-                <a:spcPts val="1250"/>
-              </a:lnSpc>
-              <a:buNone/>
-            </a:pPr>
-            <a:r>
-              <a:rPr lang="en-US" sz="1000" dirty="0">
-                <a:solidFill>
-                  <a:srgbClr val="55608A"/>
-                </a:solidFill>
-                <a:latin typeface="Calibri" pitchFamily="34" charset="0"/>
-                <a:ea typeface="Calibri" pitchFamily="34" charset="-122"/>
-                <a:cs typeface="Calibri" pitchFamily="34" charset="-120"/>
-              </a:rPr>
-              <a:t>The same trail, narrowed to what you did</a:t>
+              <a:t>Your own details, QR ID and notification switch</a:t>
             </a:r>
             <a:endParaRPr lang="en-US" sz="1000" dirty="0"/>
           </a:p>
@@ -37751,7 +37491,7 @@
                 <a:ea typeface="Calibri" pitchFamily="34" charset="-122"/>
                 <a:cs typeface="Calibri" pitchFamily="34" charset="-120"/>
               </a:rPr>
-              <a:t>Create a Principal, Registrar, Faculty, Staff or Guidance account, with department, position and division scope</a:t>
+              <a:t>Create any account the school needs - another Admin included - with department, position and division scope</a:t>
             </a:r>
             <a:endParaRPr lang="en-US" sz="1000" dirty="0"/>
           </a:p>
@@ -38771,7 +38511,7 @@
                 <a:ea typeface="Cambria" pitchFamily="34" charset="-122"/>
                 <a:cs typeface="Cambria" pitchFamily="34" charset="-120"/>
               </a:rPr>
-              <a:t>Money, safety, oversight and going live</a:t>
+              <a:t>Money, safety and the school's own numbers</a:t>
             </a:r>
             <a:endParaRPr lang="en-US" sz="3200" dirty="0"/>
           </a:p>
@@ -39678,7 +39418,7 @@
                 <a:ea typeface="Calibri" pitchFamily="34" charset="-122"/>
                 <a:cs typeface="Calibri" pitchFamily="34" charset="-120"/>
               </a:rPr>
-              <a:t>Audit Trail</a:t>
+              <a:t>Payroll</a:t>
             </a:r>
             <a:endParaRPr lang="en-US" sz="1250" dirty="0"/>
           </a:p>
@@ -39720,7 +39460,7 @@
                 <a:ea typeface="Calibri" pitchFamily="34" charset="-122"/>
                 <a:cs typeface="Calibri" pitchFamily="34" charset="-120"/>
               </a:rPr>
-              <a:t>Filter every change by module, date and person</a:t>
+              <a:t>Rates, contributions and the monthly run, with printed payslips</a:t>
             </a:r>
             <a:endParaRPr lang="en-US" sz="1000" dirty="0"/>
           </a:p>
@@ -39808,7 +39548,7 @@
                 <a:ea typeface="Calibri" pitchFamily="34" charset="-122"/>
                 <a:cs typeface="Calibri" pitchFamily="34" charset="-120"/>
               </a:rPr>
-              <a:t>System Check</a:t>
+              <a:t>Inventory</a:t>
             </a:r>
             <a:endParaRPr lang="en-US" sz="1250" dirty="0"/>
           </a:p>
@@ -39850,7 +39590,7 @@
                 <a:ea typeface="Calibri" pitchFamily="34" charset="-122"/>
                 <a:cs typeface="Calibri" pitchFamily="34" charset="-120"/>
               </a:rPr>
-              <a:t>Prove the deployment works before the first school day</a:t>
+              <a:t>Stock room, movement log and reorder list</a:t>
             </a:r>
             <a:endParaRPr lang="en-US" sz="1000" dirty="0"/>
           </a:p>
@@ -39938,7 +39678,7 @@
                 <a:ea typeface="Calibri" pitchFamily="34" charset="-122"/>
                 <a:cs typeface="Calibri" pitchFamily="34" charset="-120"/>
               </a:rPr>
-              <a:t>Profile</a:t>
+              <a:t>Leave &amp; Timesheets</a:t>
             </a:r>
             <a:endParaRPr lang="en-US" sz="1250" dirty="0"/>
           </a:p>
@@ -39980,7 +39720,137 @@
                 <a:ea typeface="Calibri" pitchFamily="34" charset="-122"/>
                 <a:cs typeface="Calibri" pitchFamily="34" charset="-120"/>
               </a:rPr>
-              <a:t>Your own details, QR ID, activity and notification switch</a:t>
+              <a:t>Decide staff leave, and read the hours the scanner recorded</a:t>
+            </a:r>
+            <a:endParaRPr lang="en-US" sz="1000" dirty="0"/>
+          </a:p>
+        </p:txBody>
+      </p:sp>
+      <p:sp>
+        <p:nvSpPr>
+          <p:cNvPr id="41" name="Shape 30"/>
+          <p:cNvSpPr/>
+          <p:nvPr/>
+        </p:nvSpPr>
+        <p:spPr>
+          <a:xfrm>
+            <a:off x="6323076" y="5056632"/>
+            <a:ext cx="384048" cy="384048"/>
+          </a:xfrm>
+          <a:prstGeom prst="ellipse">
+            <a:avLst/>
+          </a:prstGeom>
+          <a:solidFill>
+            <a:srgbClr val="CADCFC"/>
+          </a:solidFill>
+          <a:ln w="12700">
+            <a:solidFill>
+              <a:srgbClr val="CADCFC"/>
+            </a:solidFill>
+            <a:prstDash val="solid"/>
+          </a:ln>
+        </p:spPr>
+      </p:sp>
+      <p:pic>
+        <p:nvPicPr>
+          <p:cNvPr id="42" name="Image 9" descr="preencoded.png">    </p:cNvPr>
+          <p:cNvPicPr>
+            <a:picLocks noChangeAspect="1"/>
+          </p:cNvPicPr>
+          <p:nvPr/>
+        </p:nvPicPr>
+        <p:blipFill>
+          <a:blip r:embed="rId10"/>
+          <a:stretch>
+            <a:fillRect/>
+          </a:stretch>
+        </p:blipFill>
+        <p:spPr>
+          <a:xfrm>
+            <a:off x="6428232" y="5161788"/>
+            <a:ext cx="173736" cy="173736"/>
+          </a:xfrm>
+          <a:prstGeom prst="rect">
+            <a:avLst/>
+          </a:prstGeom>
+        </p:spPr>
+      </p:pic>
+      <p:sp>
+        <p:nvSpPr>
+          <p:cNvPr id="43" name="Text 31"/>
+          <p:cNvSpPr txBox="1"/>
+          <p:nvPr/>
+        </p:nvSpPr>
+        <p:spPr>
+          <a:xfrm>
+            <a:off x="6835140" y="5001768"/>
+            <a:ext cx="4713732" cy="237744"/>
+          </a:xfrm>
+          <a:prstGeom prst="rect">
+            <a:avLst/>
+          </a:prstGeom>
+          <a:noFill/>
+          <a:ln/>
+        </p:spPr>
+        <p:txBody>
+          <a:bodyPr wrap="square" lIns="0" tIns="0" rIns="0" bIns="0" rtlCol="0" anchor="ctr"/>
+          <a:lstStyle/>
+          <a:p>
+            <a:pPr indent="0" marL="0">
+              <a:buNone/>
+            </a:pPr>
+            <a:r>
+              <a:rPr lang="en-US" sz="1250" b="1" dirty="0">
+                <a:solidFill>
+                  <a:srgbClr val="1E2761"/>
+                </a:solidFill>
+                <a:latin typeface="Calibri" pitchFamily="34" charset="0"/>
+                <a:ea typeface="Calibri" pitchFamily="34" charset="-122"/>
+                <a:cs typeface="Calibri" pitchFamily="34" charset="-120"/>
+              </a:rPr>
+              <a:t>Profile</a:t>
+            </a:r>
+            <a:endParaRPr lang="en-US" sz="1250" dirty="0"/>
+          </a:p>
+        </p:txBody>
+      </p:sp>
+      <p:sp>
+        <p:nvSpPr>
+          <p:cNvPr id="44" name="Text 32"/>
+          <p:cNvSpPr txBox="1"/>
+          <p:nvPr/>
+        </p:nvSpPr>
+        <p:spPr>
+          <a:xfrm>
+            <a:off x="6835140" y="5234940"/>
+            <a:ext cx="4713732" cy="365760"/>
+          </a:xfrm>
+          <a:prstGeom prst="rect">
+            <a:avLst/>
+          </a:prstGeom>
+          <a:noFill/>
+          <a:ln/>
+        </p:spPr>
+        <p:txBody>
+          <a:bodyPr wrap="square" lIns="0" tIns="0" rIns="0" bIns="0" rtlCol="0" anchor="ctr"/>
+          <a:lstStyle/>
+          <a:p>
+            <a:pPr indent="0" marL="0">
+              <a:lnSpc>
+                <a:spcPts val="1250"/>
+              </a:lnSpc>
+              <a:buNone/>
+            </a:pPr>
+            <a:r>
+              <a:rPr lang="en-US" sz="1000" dirty="0">
+                <a:solidFill>
+                  <a:srgbClr val="55608A"/>
+                </a:solidFill>
+                <a:latin typeface="Calibri" pitchFamily="34" charset="0"/>
+                <a:ea typeface="Calibri" pitchFamily="34" charset="-122"/>
+                <a:cs typeface="Calibri" pitchFamily="34" charset="-120"/>
+              </a:rPr>
+              <a:t>Your own details, QR ID and notification switch</a:t>
             </a:r>
             <a:endParaRPr lang="en-US" sz="1000" dirty="0"/>
           </a:p>
